--- a/BaoCao_TienDo_DATN_N&B_Fashion.pptx
+++ b/BaoCao_TienDo_DATN_N&B_Fashion.pptx
@@ -4784,7 +4784,7 @@
               </a:defRPr>
             </a:pPr>
             <a:r>
-              <a:t>2. GỢI Ý SIZE CƠ THỂ THÔNG MINH (AI RECOMMENDATION)</a:t>
+              <a:t>2. TRỢ LÝ AI STYLIST &amp; COMBO CÁ NHÂN HÓA (GEMINI LLM)</a:t>
             </a:r>
           </a:p>
           <a:p>
@@ -4796,7 +4796,7 @@
               </a:defRPr>
             </a:pPr>
             <a:r>
-              <a:t>• Khách chỉ cần nhập Chiều cao &amp; Cân nặng (hoặc số đo 3 vòng: ngực, eo, mông).</a:t>
+              <a:t>• Tích hợp Chatbox AI Stylist độc quyền, kết nối mô hình ngôn ngữ lớn Google Gemini.</a:t>
             </a:r>
           </a:p>
           <a:p>
@@ -4808,7 +4808,7 @@
               </a:defRPr>
             </a:pPr>
             <a:r>
-              <a:t>• Thuật toán nhân trắc học tự động ước lượng và so khớp bảng size thực tế của hãng.</a:t>
+              <a:t>• Cá nhân hóa đa nguồn: Số đo nhân trắc + Lịch sử tìm kiếm gần nhất + Lịch sử đơn hàng đã đặt (phối chéo tủ đồ cũ).</a:t>
             </a:r>
           </a:p>
           <a:p>
@@ -4820,7 +4820,7 @@
               </a:defRPr>
             </a:pPr>
             <a:r>
-              <a:t>• Tự động gắn huy hiệu 'Gợi ý cho bạn: Size M' ngay trên giao diện đặt hàng.</a:t>
+              <a:t>• Tự động sinh Thẻ Combo Mua Sắm Thương Mại (Áo + Quần) với ảnh thật, giá thật, 1 nút 'Thêm giỏ' &amp; 'Mua ngay'.</a:t>
             </a:r>
           </a:p>
         </p:txBody>
@@ -5776,7 +5776,7 @@
               </a:defRPr>
             </a:pPr>
             <a:r>
-              <a:t>KỊCH BẢN 1: KHÁCH HÀNG</a:t>
+              <a:t>KỊCH BẢN 1: KHÁCH HÀNG &amp; AI STYLIST</a:t>
             </a:r>
           </a:p>
           <a:p>
@@ -5788,7 +5788,7 @@
               </a:defRPr>
             </a:pPr>
             <a:r>
-              <a:t>1. Truy cập trang chủ N&amp;B &amp; Danh mục sản phẩm (55 sản phẩm).</a:t>
+              <a:t>1. Mở Chatbox AI Stylist -&gt; Nhận tư vấn cá nhân hóa theo số đo, lịch sử tìm kiếm &amp; đơn hàng cũ.</a:t>
             </a:r>
           </a:p>
           <a:p>
@@ -5800,7 +5800,7 @@
               </a:defRPr>
             </a:pPr>
             <a:r>
-              <a:t>2. Nhập số đo chiều cao/cân nặng tại trang Tài khoản.</a:t>
+              <a:t>2. Nhận Thẻ Combo Mua Sắm trực quan -&gt; Bấm 'Thêm vào giỏ' hoặc 'Mua ngay' 1-chạm.</a:t>
             </a:r>
           </a:p>
           <a:p>
@@ -5812,7 +5812,7 @@
               </a:defRPr>
             </a:pPr>
             <a:r>
-              <a:t>3. Vào xem chi tiết Áo sơ mi / Áo thun -&gt; Thấy huy hiệu gợi ý size M.</a:t>
+              <a:t>3. Truy cập Phòng thử đồ 3D -&gt; Trải nghiệm xoay 360 độ, kiểm tra độ rủ vải và thẻ Fit Card.</a:t>
             </a:r>
           </a:p>
           <a:p>
@@ -5824,7 +5824,7 @@
               </a:defRPr>
             </a:pPr>
             <a:r>
-              <a:t>4. Bấm 'Thử đồ 3D' -&gt; Trải nghiệm xoay lật 360 độ và đổi màu áo.</a:t>
+              <a:t>4. Đặt hàng qua COD hoặc quét mã VietQR tự động với sổ địa chỉ nhận hàng.</a:t>
             </a:r>
           </a:p>
           <a:p>
@@ -5836,7 +5836,7 @@
               </a:defRPr>
             </a:pPr>
             <a:r>
-              <a:t>5. Đặt hàng qua COD với sổ địa chỉ nhận hàng.</a:t>
+              <a:t>5. Quy trình khép kín: Tư vấn AI -&gt; Thử đồ 3D -&gt; Mua hàng chỉ trong vài thao tác.</a:t>
             </a:r>
           </a:p>
         </p:txBody>
@@ -6311,19 +6311,24 @@
               </a:defRPr>
             </a:pPr>
             <a:r>
+              <a:t>✔ Đột phá AI Stylist: Tích hợp Gemini LLM gợi ý combo cá nhân hóa theo số đo, lịch sử tìm kiếm &amp; đơn hàng cũ.</a:t>
+            </a:r>
+          </a:p>
+          <a:p>
+            <a:pPr>
+              <a:defRPr sz="1300">
+                <a:solidFill>
+                  <a:srgbClr val="6B7280"/>
+                </a:solidFill>
+              </a:defRPr>
+            </a:pPr>
+            <a:r>
               <a:t>✔ Tích hợp thành công API thật của bưu cục Giao Hàng Nhanh (GHN) và module in phiếu đóng hàng bưu điện.</a:t>
             </a:r>
           </a:p>
           <a:p>
-            <a:pPr>
-              <a:defRPr sz="1300">
-                <a:solidFill>
-                  <a:srgbClr val="6B7280"/>
-                </a:solidFill>
-              </a:defRPr>
-            </a:pPr>
-            <a:r>
-              <a:t>✔ Bộ kiểm thử tự động toàn diện: 78 backend pytest, 60 node test, 65 vitest UI đều pass 100%.</a:t>
+            <a:r>
+              <a:t>✔ Bộ kiểm thử tự động toàn diện: 78 backend pytest, 60 node integration tests, 70 vitest UI tests đều pass 100%.</a:t>
             </a:r>
           </a:p>
         </p:txBody>

--- a/BaoCao_TienDo_DATN_N&B_Fashion.pptx
+++ b/BaoCao_TienDo_DATN_N&B_Fashion.pptx
@@ -12,8 +12,11 @@
     <p:sldId id="260" r:id="rId11"/>
     <p:sldId id="261" r:id="rId12"/>
     <p:sldId id="262" r:id="rId13"/>
+    <p:sldId id="263" r:id="rId14"/>
+    <p:sldId id="264" r:id="rId15"/>
+    <p:sldId id="265" r:id="rId16"/>
   </p:sldIdLst>
-  <p:sldSz cx="12191695" cy="6858000" type="screen4x3"/>
+  <p:sldSz cx="12188952" cy="6858000" type="screen4x3"/>
   <p:notesSz cx="6858000" cy="9144000"/>
   <p:defaultTextStyle>
     <a:defPPr>
@@ -3103,13 +3106,13 @@
         <p:spPr>
           <a:xfrm>
             <a:off x="0" y="0"/>
-            <a:ext cx="12191695" cy="6858000"/>
+            <a:ext cx="12188952" cy="6858000"/>
           </a:xfrm>
           <a:prstGeom prst="rect">
             <a:avLst/>
           </a:prstGeom>
           <a:solidFill>
-            <a:srgbClr val="181A20"/>
+            <a:srgbClr val="F8FAFC"/>
           </a:solidFill>
           <a:ln>
             <a:noFill/>
@@ -3139,23 +3142,25 @@
       </p:sp>
       <p:sp>
         <p:nvSpPr>
-          <p:cNvPr id="3" name="Rectangle 2"/>
+          <p:cNvPr id="3" name="Rounded Rectangle 2"/>
           <p:cNvSpPr/>
           <p:nvPr/>
         </p:nvSpPr>
         <p:spPr>
           <a:xfrm>
-            <a:off x="731520" y="1097280"/>
-            <a:ext cx="731520" cy="54864"/>
-          </a:xfrm>
-          <a:prstGeom prst="rect">
+            <a:off x="914400" y="822960"/>
+            <a:ext cx="10360152" cy="5212080"/>
+          </a:xfrm>
+          <a:prstGeom prst="roundRect">
             <a:avLst/>
           </a:prstGeom>
           <a:solidFill>
-            <a:srgbClr val="C2985B"/>
+            <a:srgbClr val="FFFFFF"/>
           </a:solidFill>
           <a:ln>
-            <a:noFill/>
+            <a:solidFill>
+              <a:srgbClr val="E2E8F0"/>
+            </a:solidFill>
           </a:ln>
         </p:spPr>
         <p:style>
@@ -3188,44 +3193,8 @@
         </p:nvSpPr>
         <p:spPr>
           <a:xfrm>
-            <a:off x="731520" y="1280160"/>
-            <a:ext cx="10698480" cy="365760"/>
-          </a:xfrm>
-          <a:prstGeom prst="rect">
-            <a:avLst/>
-          </a:prstGeom>
-          <a:noFill/>
-        </p:spPr>
-        <p:txBody>
-          <a:bodyPr wrap="none">
-            <a:spAutoFit/>
-          </a:bodyPr>
-          <a:lstStyle/>
-          <a:p>
-            <a:pPr>
-              <a:defRPr sz="1300" b="1">
-                <a:solidFill>
-                  <a:srgbClr val="C2985B"/>
-                </a:solidFill>
-                <a:latin typeface="Segoe UI"/>
-              </a:defRPr>
-            </a:pPr>
-            <a:r>
-              <a:t>BÁO CÁO TIẾN ĐỘ ĐỒ ÁN TỐT NGHIỆP — HỌC KỲ I (2026)</a:t>
-            </a:r>
-          </a:p>
-        </p:txBody>
-      </p:sp>
-      <p:sp>
-        <p:nvSpPr>
-          <p:cNvPr id="5" name="TextBox 4"/>
-          <p:cNvSpPr txBox="1"/>
-          <p:nvPr/>
-        </p:nvSpPr>
-        <p:spPr>
-          <a:xfrm>
-            <a:off x="731520" y="1691640"/>
-            <a:ext cx="10698480" cy="1828800"/>
+            <a:off x="1371600" y="1371600"/>
+            <a:ext cx="9445752" cy="4114800"/>
           </a:xfrm>
           <a:prstGeom prst="rect">
             <a:avLst/>
@@ -3239,80 +3208,112 @@
           <a:lstStyle/>
           <a:p>
             <a:pPr>
-              <a:defRPr sz="3200" b="1">
-                <a:solidFill>
-                  <a:srgbClr val="FFFFFF"/>
-                </a:solidFill>
-                <a:latin typeface="Segoe UI"/>
-              </a:defRPr>
-            </a:pPr>
-            <a:r>
-              <a:t>Nền Tảng Thương Mại Điện Tử Thời Trang May Sẵn N&amp;B</a:t>
-            </a:r>
-            <a:br/>
-            <a:r>
-              <a:t>Tích Hợp Thử Đồ 3D &amp; Vận Hành Logistics</a:t>
-            </a:r>
-          </a:p>
-        </p:txBody>
-      </p:sp>
-      <p:sp>
-        <p:nvSpPr>
-          <p:cNvPr id="6" name="TextBox 5"/>
-          <p:cNvSpPr txBox="1"/>
-          <p:nvPr/>
-        </p:nvSpPr>
-        <p:spPr>
-          <a:xfrm>
-            <a:off x="731520" y="3566160"/>
-            <a:ext cx="10698480" cy="731520"/>
-          </a:xfrm>
-          <a:prstGeom prst="rect">
-            <a:avLst/>
-          </a:prstGeom>
-          <a:noFill/>
-        </p:spPr>
-        <p:txBody>
-          <a:bodyPr wrap="square">
-            <a:spAutoFit/>
-          </a:bodyPr>
-          <a:lstStyle/>
-          <a:p>
-            <a:pPr>
-              <a:defRPr sz="1400">
-                <a:solidFill>
-                  <a:srgbClr val="9CA3AF"/>
-                </a:solidFill>
-                <a:latin typeface="Segoe UI"/>
-              </a:defRPr>
-            </a:pPr>
-            <a:r>
-              <a:t>Nghiên cứu ứng dụng đồ họa 3D thời gian thực trên Web và chuẩn hóa luồng giao vận bưu phẩm tự động trong thương mại điện tử thời trang cao cấp.</a:t>
-            </a:r>
-          </a:p>
-        </p:txBody>
-      </p:sp>
-      <p:sp>
-        <p:nvSpPr>
-          <p:cNvPr id="7" name="Rounded Rectangle 6"/>
+              <a:spcAft>
+                <a:spcPts val="1600"/>
+              </a:spcAft>
+              <a:defRPr sz="1300" b="1">
+                <a:solidFill>
+                  <a:srgbClr val="2563EB"/>
+                </a:solidFill>
+              </a:defRPr>
+            </a:pPr>
+            <a:r>
+              <a:t>ALBUM HÌNH ẢNH &amp; GIỚI THIỆU PHẦN MỀM</a:t>
+            </a:r>
+          </a:p>
+          <a:p>
+            <a:pPr>
+              <a:defRPr sz="3000" b="1">
+                <a:solidFill>
+                  <a:srgbClr val="0F172A"/>
+                </a:solidFill>
+              </a:defRPr>
+            </a:pPr>
+            <a:r>
+              <a:t>HỆ THỐNG THỜI TRANG N&amp;B FASHION</a:t>
+            </a:r>
+          </a:p>
+          <a:p>
+            <a:pPr>
+              <a:spcAft>
+                <a:spcPts val="2800"/>
+              </a:spcAft>
+              <a:defRPr sz="1600">
+                <a:solidFill>
+                  <a:srgbClr val="2563EB"/>
+                </a:solidFill>
+              </a:defRPr>
+            </a:pPr>
+            <a:r>
+              <a:t>Bộ Ảnh Chụp Thực Tế 8 Màn Hình Tính Năng Đã Vận Hành Hoàn Thiện</a:t>
+            </a:r>
+          </a:p>
+          <a:p>
+            <a:pPr>
+              <a:spcAft>
+                <a:spcPts val="3000"/>
+              </a:spcAft>
+              <a:defRPr sz="1300">
+                <a:solidFill>
+                  <a:srgbClr val="64748B"/>
+                </a:solidFill>
+              </a:defRPr>
+            </a:pPr>
+            <a:r>
+              <a:t>Minh họa chi tiết: Cửa hàng TMĐT, Bộ lọc, Chi tiết sản phẩm, AI Stylist, Thử đồ 3D và Bưu cục GHN</a:t>
+            </a:r>
+          </a:p>
+          <a:p>
+            <a:pPr>
+              <a:defRPr sz="1300" b="1">
+                <a:solidFill>
+                  <a:srgbClr val="1E293B"/>
+                </a:solidFill>
+              </a:defRPr>
+            </a:pPr>
+            <a:r>
+              <a:t>Nhóm phát triển: Võ Minh Nhật  &amp;  Phạm Lê Gia Bảo</a:t>
+            </a:r>
+          </a:p>
+        </p:txBody>
+      </p:sp>
+    </p:spTree>
+  </p:cSld>
+  <p:clrMapOvr>
+    <a:masterClrMapping/>
+  </p:clrMapOvr>
+</p:sld>
+</file>
+
+<file path=ppt/slides/slide10.xml><?xml version="1.0" encoding="utf-8"?>
+<p:sld xmlns:a="http://schemas.openxmlformats.org/drawingml/2006/main" xmlns:p="http://schemas.openxmlformats.org/presentationml/2006/main" xmlns:r="http://schemas.openxmlformats.org/officeDocument/2006/relationships">
+  <p:cSld>
+    <p:spTree>
+      <p:nvGrpSpPr>
+        <p:cNvPr id="1" name=""/>
+        <p:cNvGrpSpPr/>
+        <p:nvPr/>
+      </p:nvGrpSpPr>
+      <p:grpSpPr/>
+      <p:sp>
+        <p:nvSpPr>
+          <p:cNvPr id="2" name="Rectangle 1"/>
           <p:cNvSpPr/>
           <p:nvPr/>
         </p:nvSpPr>
         <p:spPr>
           <a:xfrm>
-            <a:off x="731520" y="4663440"/>
-            <a:ext cx="4114800" cy="1371600"/>
-          </a:xfrm>
-          <a:prstGeom prst="roundRect">
+            <a:off x="0" y="0"/>
+            <a:ext cx="12188952" cy="6858000"/>
+          </a:xfrm>
+          <a:prstGeom prst="rect">
             <a:avLst/>
           </a:prstGeom>
           <a:solidFill>
-            <a:srgbClr val="232733"/>
+            <a:srgbClr val="F8FAFC"/>
           </a:solidFill>
           <a:ln>
-            <a:solidFill>
-              <a:srgbClr val="374151"/>
-            </a:solidFill>
+            <a:noFill/>
           </a:ln>
         </p:spPr>
         <p:style>
@@ -3330,54 +3331,138 @@
           </a:fontRef>
         </p:style>
         <p:txBody>
-          <a:bodyPr rtlCol="0" anchor="ctr" lIns="274320" tIns="228600"/>
-          <a:lstStyle/>
-          <a:p>
-            <a:pPr algn="ctr">
+          <a:bodyPr rtlCol="0" anchor="ctr"/>
+          <a:lstStyle/>
+          <a:p>
+            <a:pPr algn="ctr"/>
+          </a:p>
+        </p:txBody>
+      </p:sp>
+      <p:sp>
+        <p:nvSpPr>
+          <p:cNvPr id="3" name="TextBox 2"/>
+          <p:cNvSpPr txBox="1"/>
+          <p:nvPr/>
+        </p:nvSpPr>
+        <p:spPr>
+          <a:xfrm>
+            <a:off x="731520" y="320040"/>
+            <a:ext cx="7315200" cy="320040"/>
+          </a:xfrm>
+          <a:prstGeom prst="rect">
+            <a:avLst/>
+          </a:prstGeom>
+          <a:noFill/>
+        </p:spPr>
+        <p:txBody>
+          <a:bodyPr wrap="square">
+            <a:spAutoFit/>
+          </a:bodyPr>
+          <a:lstStyle/>
+          <a:p>
+            <a:pPr>
               <a:defRPr sz="1100" b="1">
                 <a:solidFill>
-                  <a:srgbClr val="C2985B"/>
-                </a:solidFill>
-              </a:defRPr>
-            </a:pPr>
-            <a:r>
-              <a:t>GIẢNG VIÊN HƯỚNG DẪN</a:t>
-            </a:r>
-          </a:p>
-          <a:p>
-            <a:pPr>
-              <a:defRPr sz="1800" b="1">
-                <a:solidFill>
-                  <a:srgbClr val="FFFFFF"/>
-                </a:solidFill>
-              </a:defRPr>
-            </a:pPr>
-            <a:r>
-              <a:t>ThS. Võ Anh Tiến</a:t>
-            </a:r>
-          </a:p>
-        </p:txBody>
-      </p:sp>
-      <p:sp>
-        <p:nvSpPr>
-          <p:cNvPr id="8" name="Rounded Rectangle 7"/>
+                  <a:srgbClr val="2563EB"/>
+                </a:solidFill>
+              </a:defRPr>
+            </a:pPr>
+            <a:r>
+              <a:t>TỔNG KẾT PHẦN MỀM</a:t>
+            </a:r>
+          </a:p>
+        </p:txBody>
+      </p:sp>
+      <p:sp>
+        <p:nvSpPr>
+          <p:cNvPr id="4" name="TextBox 3"/>
+          <p:cNvSpPr txBox="1"/>
+          <p:nvPr/>
+        </p:nvSpPr>
+        <p:spPr>
+          <a:xfrm>
+            <a:off x="731520" y="594360"/>
+            <a:ext cx="10515600" cy="502920"/>
+          </a:xfrm>
+          <a:prstGeom prst="rect">
+            <a:avLst/>
+          </a:prstGeom>
+          <a:noFill/>
+        </p:spPr>
+        <p:txBody>
+          <a:bodyPr wrap="square">
+            <a:spAutoFit/>
+          </a:bodyPr>
+          <a:lstStyle/>
+          <a:p>
+            <a:pPr>
+              <a:defRPr sz="2000" b="1">
+                <a:solidFill>
+                  <a:srgbClr val="0F172A"/>
+                </a:solidFill>
+              </a:defRPr>
+            </a:pPr>
+            <a:r>
+              <a:t>Tiến Độ Tính Năng: Đã Xong &amp; Đang Triển Khai</a:t>
+            </a:r>
+          </a:p>
+        </p:txBody>
+      </p:sp>
+      <p:sp>
+        <p:nvSpPr>
+          <p:cNvPr id="5" name="TextBox 4"/>
+          <p:cNvSpPr txBox="1"/>
+          <p:nvPr/>
+        </p:nvSpPr>
+        <p:spPr>
+          <a:xfrm>
+            <a:off x="731520" y="1097280"/>
+            <a:ext cx="10515600" cy="320040"/>
+          </a:xfrm>
+          <a:prstGeom prst="rect">
+            <a:avLst/>
+          </a:prstGeom>
+          <a:noFill/>
+        </p:spPr>
+        <p:txBody>
+          <a:bodyPr wrap="square">
+            <a:spAutoFit/>
+          </a:bodyPr>
+          <a:lstStyle/>
+          <a:p>
+            <a:pPr>
+              <a:defRPr sz="1150">
+                <a:solidFill>
+                  <a:srgbClr val="64748B"/>
+                </a:solidFill>
+              </a:defRPr>
+            </a:pPr>
+            <a:r>
+              <a:t>Báo cáo rõ ràng các phần đã vận hành tốt và các tính năng còn đang hoàn thiện</a:t>
+            </a:r>
+          </a:p>
+        </p:txBody>
+      </p:sp>
+      <p:sp>
+        <p:nvSpPr>
+          <p:cNvPr id="6" name="Rounded Rectangle 5"/>
           <p:cNvSpPr/>
           <p:nvPr/>
         </p:nvSpPr>
         <p:spPr>
           <a:xfrm>
-            <a:off x="5120640" y="4663440"/>
-            <a:ext cx="6309360" cy="1371600"/>
+            <a:off x="731520" y="1645920"/>
+            <a:ext cx="5120640" cy="4754880"/>
           </a:xfrm>
           <a:prstGeom prst="roundRect">
             <a:avLst/>
           </a:prstGeom>
           <a:solidFill>
-            <a:srgbClr val="232733"/>
+            <a:srgbClr val="FFFFFF"/>
           </a:solidFill>
           <a:ln>
             <a:solidFill>
-              <a:srgbClr val="374151"/>
+              <a:srgbClr val="E2E8F0"/>
             </a:solidFill>
           </a:ln>
         </p:spPr>
@@ -3396,42 +3481,265 @@
           </a:fontRef>
         </p:style>
         <p:txBody>
-          <a:bodyPr rtlCol="0" anchor="ctr" lIns="274320" tIns="228600"/>
-          <a:lstStyle/>
-          <a:p>
-            <a:pPr algn="ctr">
-              <a:defRPr sz="1100" b="1">
-                <a:solidFill>
-                  <a:srgbClr val="C2985B"/>
-                </a:solidFill>
-              </a:defRPr>
-            </a:pPr>
-            <a:r>
-              <a:t>NHÓM SINH VIÊN THỰC HIỆN</a:t>
-            </a:r>
-          </a:p>
-          <a:p>
-            <a:pPr>
-              <a:defRPr sz="1800" b="1">
-                <a:solidFill>
-                  <a:srgbClr val="FFFFFF"/>
-                </a:solidFill>
-              </a:defRPr>
-            </a:pPr>
-            <a:r>
-              <a:t>Võ Minh Nhật  &amp;  Phạm Lê Gia Bảo</a:t>
-            </a:r>
-          </a:p>
-          <a:p>
-            <a:pPr>
-              <a:defRPr sz="1200">
-                <a:solidFill>
-                  <a:srgbClr val="9CA3AF"/>
-                </a:solidFill>
-              </a:defRPr>
-            </a:pPr>
-            <a:r>
-              <a:t>Đề tài Đồ án Tốt nghiệp — Báo cáo tiến độ: 29/10/2026</a:t>
+          <a:bodyPr rtlCol="0" anchor="ctr"/>
+          <a:lstStyle/>
+          <a:p>
+            <a:pPr algn="ctr"/>
+          </a:p>
+        </p:txBody>
+      </p:sp>
+      <p:sp>
+        <p:nvSpPr>
+          <p:cNvPr id="7" name="TextBox 6"/>
+          <p:cNvSpPr txBox="1"/>
+          <p:nvPr/>
+        </p:nvSpPr>
+        <p:spPr>
+          <a:xfrm>
+            <a:off x="914400" y="1828800"/>
+            <a:ext cx="4754880" cy="4389120"/>
+          </a:xfrm>
+          <a:prstGeom prst="rect">
+            <a:avLst/>
+          </a:prstGeom>
+          <a:noFill/>
+        </p:spPr>
+        <p:txBody>
+          <a:bodyPr wrap="square">
+            <a:spAutoFit/>
+          </a:bodyPr>
+          <a:lstStyle/>
+          <a:p>
+            <a:pPr>
+              <a:spcAft>
+                <a:spcPts val="1200"/>
+              </a:spcAft>
+              <a:defRPr sz="1300" b="1">
+                <a:solidFill>
+                  <a:srgbClr val="16A34A"/>
+                </a:solidFill>
+              </a:defRPr>
+            </a:pPr>
+            <a:r>
+              <a:t>TÍNH NĂNG ĐÃ VẬN HÀNH TỐT (XONG)</a:t>
+            </a:r>
+          </a:p>
+          <a:p>
+            <a:pPr>
+              <a:spcAft>
+                <a:spcPts val="600"/>
+              </a:spcAft>
+              <a:defRPr sz="1050">
+                <a:solidFill>
+                  <a:srgbClr val="1E293B"/>
+                </a:solidFill>
+              </a:defRPr>
+            </a:pPr>
+            <a:r>
+              <a:t>✔ Cửa hàng TMĐT: Duyệt 55 sản phẩm, giỏ hàng, đặt hàng COD, khóa chống trùng đơn.</a:t>
+            </a:r>
+          </a:p>
+          <a:p>
+            <a:pPr>
+              <a:spcAft>
+                <a:spcPts val="600"/>
+              </a:spcAft>
+              <a:defRPr sz="1050">
+                <a:solidFill>
+                  <a:srgbClr val="1E293B"/>
+                </a:solidFill>
+              </a:defRPr>
+            </a:pPr>
+            <a:r>
+              <a:t>✔ Trợ lý AI Stylist: Tư vấn vóc dáng, cá nhân hóa theo tìm kiếm &amp; đơn cũ.</a:t>
+            </a:r>
+          </a:p>
+          <a:p>
+            <a:pPr>
+              <a:spcAft>
+                <a:spcPts val="600"/>
+              </a:spcAft>
+              <a:defRPr sz="1050">
+                <a:solidFill>
+                  <a:srgbClr val="1E293B"/>
+                </a:solidFill>
+              </a:defRPr>
+            </a:pPr>
+            <a:r>
+              <a:t>✔ Thẻ Combo Mua Sắm: Gợi ý 1 Áo + 1 Quần kèm nút Mua ngay 1-chạm.</a:t>
+            </a:r>
+          </a:p>
+          <a:p>
+            <a:pPr>
+              <a:spcAft>
+                <a:spcPts val="600"/>
+              </a:spcAft>
+              <a:defRPr sz="1050">
+                <a:solidFill>
+                  <a:srgbClr val="1E293B"/>
+                </a:solidFill>
+              </a:defRPr>
+            </a:pPr>
+            <a:r>
+              <a:t>✔ Phòng thử đồ 3D: Avatar co giãn theo số đo, xoay 360 độ, đổi màu sắc trang phục.</a:t>
+            </a:r>
+          </a:p>
+          <a:p>
+            <a:pPr>
+              <a:spcAft>
+                <a:spcPts val="600"/>
+              </a:spcAft>
+              <a:defRPr sz="1050">
+                <a:solidFill>
+                  <a:srgbClr val="1E293B"/>
+                </a:solidFill>
+              </a:defRPr>
+            </a:pPr>
+            <a:r>
+              <a:t>✔ Quản trị Admin &amp; GHN: Tạo mã vận đơn bưu điện thật, in phiếu giao hàng A4/A5.</a:t>
+            </a:r>
+          </a:p>
+          <a:p>
+            <a:pPr>
+              <a:spcAft>
+                <a:spcPts val="600"/>
+              </a:spcAft>
+              <a:defRPr sz="1050">
+                <a:solidFill>
+                  <a:srgbClr val="1E293B"/>
+                </a:solidFill>
+              </a:defRPr>
+            </a:pPr>
+            <a:r>
+              <a:t>✔ Bộ kiểm thử tự động: 78 pytest, 60 node test, 70 vitest pass 100%.</a:t>
+            </a:r>
+          </a:p>
+        </p:txBody>
+      </p:sp>
+      <p:sp>
+        <p:nvSpPr>
+          <p:cNvPr id="8" name="Rounded Rectangle 7"/>
+          <p:cNvSpPr/>
+          <p:nvPr/>
+        </p:nvSpPr>
+        <p:spPr>
+          <a:xfrm>
+            <a:off x="6126480" y="1645920"/>
+            <a:ext cx="5303520" cy="4754880"/>
+          </a:xfrm>
+          <a:prstGeom prst="roundRect">
+            <a:avLst/>
+          </a:prstGeom>
+          <a:solidFill>
+            <a:srgbClr val="FFFFFF"/>
+          </a:solidFill>
+          <a:ln>
+            <a:solidFill>
+              <a:srgbClr val="E2E8F0"/>
+            </a:solidFill>
+          </a:ln>
+        </p:spPr>
+        <p:style>
+          <a:lnRef idx="1">
+            <a:schemeClr val="accent1"/>
+          </a:lnRef>
+          <a:fillRef idx="3">
+            <a:schemeClr val="accent1"/>
+          </a:fillRef>
+          <a:effectRef idx="2">
+            <a:schemeClr val="accent1"/>
+          </a:effectRef>
+          <a:fontRef idx="minor">
+            <a:schemeClr val="lt1"/>
+          </a:fontRef>
+        </p:style>
+        <p:txBody>
+          <a:bodyPr rtlCol="0" anchor="ctr"/>
+          <a:lstStyle/>
+          <a:p>
+            <a:pPr algn="ctr"/>
+          </a:p>
+        </p:txBody>
+      </p:sp>
+      <p:sp>
+        <p:nvSpPr>
+          <p:cNvPr id="9" name="TextBox 8"/>
+          <p:cNvSpPr txBox="1"/>
+          <p:nvPr/>
+        </p:nvSpPr>
+        <p:spPr>
+          <a:xfrm>
+            <a:off x="6309360" y="1828800"/>
+            <a:ext cx="4937760" cy="4389120"/>
+          </a:xfrm>
+          <a:prstGeom prst="rect">
+            <a:avLst/>
+          </a:prstGeom>
+          <a:noFill/>
+        </p:spPr>
+        <p:txBody>
+          <a:bodyPr wrap="square">
+            <a:spAutoFit/>
+          </a:bodyPr>
+          <a:lstStyle/>
+          <a:p>
+            <a:pPr>
+              <a:spcAft>
+                <a:spcPts val="1200"/>
+              </a:spcAft>
+              <a:defRPr sz="1300" b="1">
+                <a:solidFill>
+                  <a:srgbClr val="D97706"/>
+                </a:solidFill>
+              </a:defRPr>
+            </a:pPr>
+            <a:r>
+              <a:t>TÍNH NĂNG CHƯA XONG / ĐANG LÀM</a:t>
+            </a:r>
+          </a:p>
+          <a:p>
+            <a:pPr>
+              <a:spcAft>
+                <a:spcPts val="1000"/>
+              </a:spcAft>
+              <a:defRPr sz="1100">
+                <a:solidFill>
+                  <a:srgbClr val="1E293B"/>
+                </a:solidFill>
+              </a:defRPr>
+            </a:pPr>
+            <a:r>
+              <a:t>⏳ Cổng thanh toán Chuyển khoản tự động: Hiện mới hỗ trợ thanh toán khi nhận hàng (COD), chưa tích hợp xong cổng đối soát tiền chuyển khoản qua ngân hàng.</a:t>
+            </a:r>
+          </a:p>
+          <a:p>
+            <a:pPr>
+              <a:spcAft>
+                <a:spcPts val="1000"/>
+              </a:spcAft>
+              <a:defRPr sz="1100">
+                <a:solidFill>
+                  <a:srgbClr val="1E293B"/>
+                </a:solidFill>
+              </a:defRPr>
+            </a:pPr>
+            <a:r>
+              <a:t>⏳ Thử đồ thời gian thực qua Webcam: Tính năng ướm thử trang phục trực tiếp qua camera máy tính/điện thoại người dùng đang trong giai đoạn nghiên cứu.</a:t>
+            </a:r>
+          </a:p>
+          <a:p>
+            <a:pPr>
+              <a:spcAft>
+                <a:spcPts val="1000"/>
+              </a:spcAft>
+              <a:defRPr sz="1100">
+                <a:solidFill>
+                  <a:srgbClr val="1E293B"/>
+                </a:solidFill>
+              </a:defRPr>
+            </a:pPr>
+            <a:r>
+              <a:t>⏳ Tinh chỉnh hiển thị phòng 3D: Cần hoàn thiện thêm độ khớp của phom đồ 3D và tối ưu hiệu năng hiển thị trên thiết bị di động (Mobile WebGL).</a:t>
             </a:r>
           </a:p>
         </p:txBody>
@@ -3463,13 +3771,13 @@
         <p:spPr>
           <a:xfrm>
             <a:off x="0" y="0"/>
-            <a:ext cx="12191695" cy="6858000"/>
+            <a:ext cx="12188952" cy="6858000"/>
           </a:xfrm>
           <a:prstGeom prst="rect">
             <a:avLst/>
           </a:prstGeom>
           <a:solidFill>
-            <a:srgbClr val="F9F9FA"/>
+            <a:srgbClr val="F8FAFC"/>
           </a:solidFill>
           <a:ln>
             <a:noFill/>
@@ -3505,8 +3813,8 @@
         </p:nvSpPr>
         <p:spPr>
           <a:xfrm>
-            <a:off x="731520" y="457200"/>
-            <a:ext cx="10698480" cy="365760"/>
+            <a:off x="731520" y="320040"/>
+            <a:ext cx="7315200" cy="320040"/>
           </a:xfrm>
           <a:prstGeom prst="rect">
             <a:avLst/>
@@ -3514,7 +3822,7 @@
           <a:noFill/>
         </p:spPr>
         <p:txBody>
-          <a:bodyPr wrap="square" lIns="0" tIns="0" rIns="0" bIns="0">
+          <a:bodyPr wrap="square">
             <a:spAutoFit/>
           </a:bodyPr>
           <a:lstStyle/>
@@ -3522,13 +3830,12 @@
             <a:pPr>
               <a:defRPr sz="1100" b="1">
                 <a:solidFill>
-                  <a:srgbClr val="1E3A8A"/>
-                </a:solidFill>
-                <a:latin typeface="Segoe UI"/>
-              </a:defRPr>
-            </a:pPr>
-            <a:r>
-              <a:t>01. BỐI CẢNH &amp; MỤC TIÊU ĐỀ TÀI</a:t>
+                  <a:srgbClr val="2563EB"/>
+                </a:solidFill>
+              </a:defRPr>
+            </a:pPr>
+            <a:r>
+              <a:t>MÀN HÌNH 01</a:t>
             </a:r>
           </a:p>
         </p:txBody>
@@ -3541,8 +3848,8 @@
         </p:nvSpPr>
         <p:spPr>
           <a:xfrm>
-            <a:off x="731520" y="777240"/>
-            <a:ext cx="10698480" cy="640080"/>
+            <a:off x="731520" y="594360"/>
+            <a:ext cx="10515600" cy="502920"/>
           </a:xfrm>
           <a:prstGeom prst="rect">
             <a:avLst/>
@@ -3550,35 +3857,69 @@
           <a:noFill/>
         </p:spPr>
         <p:txBody>
-          <a:bodyPr wrap="square" lIns="0" tIns="0" rIns="0" bIns="0">
+          <a:bodyPr wrap="square">
             <a:spAutoFit/>
           </a:bodyPr>
           <a:lstStyle/>
           <a:p>
             <a:pPr>
-              <a:defRPr sz="2400" b="1">
-                <a:solidFill>
-                  <a:srgbClr val="111827"/>
-                </a:solidFill>
-                <a:latin typeface="Segoe UI"/>
-              </a:defRPr>
-            </a:pPr>
-            <a:r>
-              <a:t>Thực Trạng Ngành Thời Trang TMĐT &amp; Định Vị N&amp;B Atelier</a:t>
-            </a:r>
-          </a:p>
-        </p:txBody>
-      </p:sp>
-      <p:sp>
-        <p:nvSpPr>
-          <p:cNvPr id="5" name="Rounded Rectangle 4"/>
+              <a:defRPr sz="2000" b="1">
+                <a:solidFill>
+                  <a:srgbClr val="0F172A"/>
+                </a:solidFill>
+              </a:defRPr>
+            </a:pPr>
+            <a:r>
+              <a:t>Trang Chủ &amp; Banner Thương Hiệu N&amp;B</a:t>
+            </a:r>
+          </a:p>
+        </p:txBody>
+      </p:sp>
+      <p:sp>
+        <p:nvSpPr>
+          <p:cNvPr id="5" name="TextBox 4"/>
+          <p:cNvSpPr txBox="1"/>
+          <p:nvPr/>
+        </p:nvSpPr>
+        <p:spPr>
+          <a:xfrm>
+            <a:off x="731520" y="1097280"/>
+            <a:ext cx="10515600" cy="320040"/>
+          </a:xfrm>
+          <a:prstGeom prst="rect">
+            <a:avLst/>
+          </a:prstGeom>
+          <a:noFill/>
+        </p:spPr>
+        <p:txBody>
+          <a:bodyPr wrap="square">
+            <a:spAutoFit/>
+          </a:bodyPr>
+          <a:lstStyle/>
+          <a:p>
+            <a:pPr>
+              <a:defRPr sz="1150">
+                <a:solidFill>
+                  <a:srgbClr val="64748B"/>
+                </a:solidFill>
+              </a:defRPr>
+            </a:pPr>
+            <a:r>
+              <a:t>Giao diện hiện đại, sang trọng, định hình phong cách thời trang cao cấp</a:t>
+            </a:r>
+          </a:p>
+        </p:txBody>
+      </p:sp>
+      <p:sp>
+        <p:nvSpPr>
+          <p:cNvPr id="6" name="Rounded Rectangle 5"/>
           <p:cNvSpPr/>
           <p:nvPr/>
         </p:nvSpPr>
         <p:spPr>
           <a:xfrm>
-            <a:off x="731520" y="1645920"/>
-            <a:ext cx="3383280" cy="4480560"/>
+            <a:off x="731520" y="1554480"/>
+            <a:ext cx="4114800" cy="4846320"/>
           </a:xfrm>
           <a:prstGeom prst="roundRect">
             <a:avLst/>
@@ -3588,7 +3929,7 @@
           </a:solidFill>
           <a:ln>
             <a:solidFill>
-              <a:srgbClr val="E2E4E9"/>
+              <a:srgbClr val="E2E8F0"/>
             </a:solidFill>
           </a:ln>
         </p:spPr>
@@ -3607,274 +3948,135 @@
           </a:fontRef>
         </p:style>
         <p:txBody>
-          <a:bodyPr rtlCol="0" anchor="ctr" wrap="square" lIns="274320" rIns="274320" tIns="274320"/>
-          <a:lstStyle/>
-          <a:p>
-            <a:pPr algn="ctr">
+          <a:bodyPr rtlCol="0" anchor="ctr"/>
+          <a:lstStyle/>
+          <a:p>
+            <a:pPr algn="ctr"/>
+          </a:p>
+        </p:txBody>
+      </p:sp>
+      <p:sp>
+        <p:nvSpPr>
+          <p:cNvPr id="7" name="TextBox 6"/>
+          <p:cNvSpPr txBox="1"/>
+          <p:nvPr/>
+        </p:nvSpPr>
+        <p:spPr>
+          <a:xfrm>
+            <a:off x="914400" y="1737360"/>
+            <a:ext cx="3749039" cy="4480560"/>
+          </a:xfrm>
+          <a:prstGeom prst="rect">
+            <a:avLst/>
+          </a:prstGeom>
+          <a:noFill/>
+        </p:spPr>
+        <p:txBody>
+          <a:bodyPr wrap="square">
+            <a:spAutoFit/>
+          </a:bodyPr>
+          <a:lstStyle/>
+          <a:p>
+            <a:pPr>
+              <a:spcAft>
+                <a:spcPts val="1200"/>
+              </a:spcAft>
               <a:defRPr sz="1200" b="1">
                 <a:solidFill>
-                  <a:srgbClr val="DC2626"/>
-                </a:solidFill>
-              </a:defRPr>
-            </a:pPr>
-            <a:r>
-              <a:t>THÁCH THỨC CỦA TMĐT</a:t>
-            </a:r>
-          </a:p>
-          <a:p>
-            <a:pPr>
-              <a:defRPr sz="1800" b="1">
-                <a:solidFill>
-                  <a:srgbClr val="111827"/>
-                </a:solidFill>
-              </a:defRPr>
-            </a:pPr>
-            <a:r>
-              <a:t>Rào cản hình dung &amp; đổi trả</a:t>
-            </a:r>
-          </a:p>
-          <a:p>
-            <a:pPr>
-              <a:defRPr sz="1300">
-                <a:solidFill>
-                  <a:srgbClr val="6B7280"/>
-                </a:solidFill>
-              </a:defRPr>
-            </a:pPr>
-            <a:r>
-              <a:t>• Tỷ lệ hoàn hàng cao (30-40%): Do khách không biết mặc lên người trông ra sao và chọn nhầm size.</a:t>
-            </a:r>
-          </a:p>
-          <a:p>
-            <a:pPr>
-              <a:defRPr sz="1300">
-                <a:solidFill>
-                  <a:srgbClr val="6B7280"/>
-                </a:solidFill>
-              </a:defRPr>
-            </a:pPr>
-            <a:r>
-              <a:t>• Thiếu trải nghiệm chân thực: Ảnh 2D tĩnh không thể hiện được độ rủ của vải, phom dáng và sự vừa vặn.</a:t>
-            </a:r>
-          </a:p>
-          <a:p>
-            <a:pPr>
-              <a:defRPr sz="1300">
-                <a:solidFill>
-                  <a:srgbClr val="6B7280"/>
-                </a:solidFill>
-              </a:defRPr>
-            </a:pPr>
-            <a:r>
-              <a:t>• Đứt gãy quy trình vận hành: Các shop nhỏ thường thủ công trong khâu tạo vận đơn và in phiếu đóng hàng.</a:t>
-            </a:r>
-          </a:p>
-        </p:txBody>
-      </p:sp>
-      <p:sp>
-        <p:nvSpPr>
-          <p:cNvPr id="6" name="Rounded Rectangle 5"/>
-          <p:cNvSpPr/>
+                  <a:srgbClr val="2563EB"/>
+                </a:solidFill>
+              </a:defRPr>
+            </a:pPr>
+            <a:r>
+              <a:t>CÁC ĐIỂM NỔI BẬT</a:t>
+            </a:r>
+          </a:p>
+          <a:p>
+            <a:pPr>
+              <a:spcAft>
+                <a:spcPts val="800"/>
+              </a:spcAft>
+              <a:defRPr sz="1050">
+                <a:solidFill>
+                  <a:srgbClr val="1E293B"/>
+                </a:solidFill>
+              </a:defRPr>
+            </a:pPr>
+            <a:r>
+              <a:t>✔ Banner thương hiệu N&amp;B Atelier chuyên nghiệp, phong cách tối giản.</a:t>
+            </a:r>
+          </a:p>
+          <a:p>
+            <a:pPr>
+              <a:spcAft>
+                <a:spcPts val="800"/>
+              </a:spcAft>
+              <a:defRPr sz="1050">
+                <a:solidFill>
+                  <a:srgbClr val="1E293B"/>
+                </a:solidFill>
+              </a:defRPr>
+            </a:pPr>
+            <a:r>
+              <a:t>✔ Hiển thị bộ sưu tập nổi bật mùa mới (Áo thun, Sơ mi, Quần dài, Váy).</a:t>
+            </a:r>
+          </a:p>
+          <a:p>
+            <a:pPr>
+              <a:spcAft>
+                <a:spcPts val="800"/>
+              </a:spcAft>
+              <a:defRPr sz="1050">
+                <a:solidFill>
+                  <a:srgbClr val="1E293B"/>
+                </a:solidFill>
+              </a:defRPr>
+            </a:pPr>
+            <a:r>
+              <a:t>✔ Thanh điều hướng thông minh: Phân loại đồ Nam, đồ Nữ, Giỏ hàng.</a:t>
+            </a:r>
+          </a:p>
+          <a:p>
+            <a:pPr>
+              <a:spcAft>
+                <a:spcPts val="800"/>
+              </a:spcAft>
+              <a:defRPr sz="1050">
+                <a:solidFill>
+                  <a:srgbClr val="1E293B"/>
+                </a:solidFill>
+              </a:defRPr>
+            </a:pPr>
+            <a:r>
+              <a:t>✔ Tích hợp nút kích hoạt nhanh Trợ lý AI Stylist ở góc phải màn hình.</a:t>
+            </a:r>
+          </a:p>
+        </p:txBody>
+      </p:sp>
+      <p:pic>
+        <p:nvPicPr>
+          <p:cNvPr id="8" name="Picture 7" descr="shot_01_home.png"/>
+          <p:cNvPicPr>
+            <a:picLocks noChangeAspect="1"/>
+          </p:cNvPicPr>
           <p:nvPr/>
-        </p:nvSpPr>
-        <p:spPr>
-          <a:xfrm>
-            <a:off x="4389120" y="1645920"/>
-            <a:ext cx="3383280" cy="4480560"/>
-          </a:xfrm>
-          <a:prstGeom prst="roundRect">
-            <a:avLst/>
-          </a:prstGeom>
-          <a:solidFill>
-            <a:srgbClr val="FFFFFF"/>
-          </a:solidFill>
-          <a:ln w="19050">
-            <a:solidFill>
-              <a:srgbClr val="C2985B"/>
-            </a:solidFill>
-          </a:ln>
-        </p:spPr>
-        <p:style>
-          <a:lnRef idx="1">
-            <a:schemeClr val="accent1"/>
-          </a:lnRef>
-          <a:fillRef idx="3">
-            <a:schemeClr val="accent1"/>
-          </a:fillRef>
-          <a:effectRef idx="2">
-            <a:schemeClr val="accent1"/>
-          </a:effectRef>
-          <a:fontRef idx="minor">
-            <a:schemeClr val="lt1"/>
-          </a:fontRef>
-        </p:style>
-        <p:txBody>
-          <a:bodyPr rtlCol="0" anchor="ctr" wrap="square" lIns="274320" rIns="274320" tIns="274320"/>
-          <a:lstStyle/>
-          <a:p>
-            <a:pPr algn="ctr">
-              <a:defRPr sz="1200" b="1">
-                <a:solidFill>
-                  <a:srgbClr val="C2985B"/>
-                </a:solidFill>
-              </a:defRPr>
-            </a:pPr>
-            <a:r>
-              <a:t>GIẢI PHÁP ĐỀ TÀI</a:t>
-            </a:r>
-          </a:p>
-          <a:p>
-            <a:pPr>
-              <a:defRPr sz="1800" b="1">
-                <a:solidFill>
-                  <a:srgbClr val="111827"/>
-                </a:solidFill>
-              </a:defRPr>
-            </a:pPr>
-            <a:r>
-              <a:t>Trải nghiệm Đột phá N&amp;B</a:t>
-            </a:r>
-          </a:p>
-          <a:p>
-            <a:pPr>
-              <a:defRPr sz="1300">
-                <a:solidFill>
-                  <a:srgbClr val="6B7280"/>
-                </a:solidFill>
-              </a:defRPr>
-            </a:pPr>
-            <a:r>
-              <a:t>• Phòng thử đồ 3D tương tác: Thử trang phục trên avatar 3D theo số đo thực tế ngay trên trình duyệt.</a:t>
-            </a:r>
-          </a:p>
-          <a:p>
-            <a:pPr>
-              <a:defRPr sz="1300">
-                <a:solidFill>
-                  <a:srgbClr val="6B7280"/>
-                </a:solidFill>
-              </a:defRPr>
-            </a:pPr>
-            <a:r>
-              <a:t>• Gợi ý kích cỡ thông minh: Tự động tính toán số đo từ Chiều cao/Cân nặng và so khớp bảng size chuẩn của hãng.</a:t>
-            </a:r>
-          </a:p>
-          <a:p>
-            <a:pPr>
-              <a:defRPr sz="1300">
-                <a:solidFill>
-                  <a:srgbClr val="6B7280"/>
-                </a:solidFill>
-              </a:defRPr>
-            </a:pPr>
-            <a:r>
-              <a:t>• Định vị thời trang cao cấp: Trải nghiệm may sẵn (Ready-to-wear) tinh tế, tối giản, sang trọng.</a:t>
-            </a:r>
-          </a:p>
-        </p:txBody>
-      </p:sp>
-      <p:sp>
-        <p:nvSpPr>
-          <p:cNvPr id="7" name="Rounded Rectangle 6"/>
-          <p:cNvSpPr/>
-          <p:nvPr/>
-        </p:nvSpPr>
-        <p:spPr>
-          <a:xfrm>
-            <a:off x="8046720" y="1645920"/>
-            <a:ext cx="3383280" cy="4480560"/>
-          </a:xfrm>
-          <a:prstGeom prst="roundRect">
-            <a:avLst/>
-          </a:prstGeom>
-          <a:solidFill>
-            <a:srgbClr val="FFFFFF"/>
-          </a:solidFill>
-          <a:ln>
-            <a:solidFill>
-              <a:srgbClr val="E2E4E9"/>
-            </a:solidFill>
-          </a:ln>
-        </p:spPr>
-        <p:style>
-          <a:lnRef idx="1">
-            <a:schemeClr val="accent1"/>
-          </a:lnRef>
-          <a:fillRef idx="3">
-            <a:schemeClr val="accent1"/>
-          </a:fillRef>
-          <a:effectRef idx="2">
-            <a:schemeClr val="accent1"/>
-          </a:effectRef>
-          <a:fontRef idx="minor">
-            <a:schemeClr val="lt1"/>
-          </a:fontRef>
-        </p:style>
-        <p:txBody>
-          <a:bodyPr rtlCol="0" anchor="ctr" wrap="square" lIns="274320" rIns="274320" tIns="274320"/>
-          <a:lstStyle/>
-          <a:p>
-            <a:pPr algn="ctr">
-              <a:defRPr sz="1200" b="1">
-                <a:solidFill>
-                  <a:srgbClr val="059669"/>
-                </a:solidFill>
-              </a:defRPr>
-            </a:pPr>
-            <a:r>
-              <a:t>VẬN HÀNH THỰC TẾ</a:t>
-            </a:r>
-          </a:p>
-          <a:p>
-            <a:pPr>
-              <a:defRPr sz="1800" b="1">
-                <a:solidFill>
-                  <a:srgbClr val="111827"/>
-                </a:solidFill>
-              </a:defRPr>
-            </a:pPr>
-            <a:r>
-              <a:t>Tích hợp Giao vận Bưu cục</a:t>
-            </a:r>
-          </a:p>
-          <a:p>
-            <a:pPr>
-              <a:defRPr sz="1300">
-                <a:solidFill>
-                  <a:srgbClr val="6B7280"/>
-                </a:solidFill>
-              </a:defRPr>
-            </a:pPr>
-            <a:r>
-              <a:t>• Kết nối API GHN tự động: 1-click tạo mã vận đơn bưu cục thật, tự động cân đối cước và tiền thu hộ COD.</a:t>
-            </a:r>
-          </a:p>
-          <a:p>
-            <a:pPr>
-              <a:defRPr sz="1300">
-                <a:solidFill>
-                  <a:srgbClr val="6B7280"/>
-                </a:solidFill>
-              </a:defRPr>
-            </a:pPr>
-            <a:r>
-              <a:t>• Phiếu đóng gói &amp; Barcode: In nhãn A4/A5 dán hộp hàng kèm mã vạch và thông tin người gửi/nhận rõ ràng.</a:t>
-            </a:r>
-          </a:p>
-          <a:p>
-            <a:pPr>
-              <a:defRPr sz="1300">
-                <a:solidFill>
-                  <a:srgbClr val="6B7280"/>
-                </a:solidFill>
-              </a:defRPr>
-            </a:pPr>
-            <a:r>
-              <a:t>• Tra cứu hành trình tức thì: Tích hợp link tracking trực tiếp từ hệ thống đối tác giao hàng.</a:t>
-            </a:r>
-          </a:p>
-        </p:txBody>
-      </p:sp>
+        </p:nvPicPr>
+        <p:blipFill>
+          <a:blip r:embed="rId2"/>
+          <a:stretch>
+            <a:fillRect/>
+          </a:stretch>
+        </p:blipFill>
+        <p:spPr>
+          <a:xfrm>
+            <a:off x="5029200" y="1554480"/>
+            <a:ext cx="6400800" cy="4846320"/>
+          </a:xfrm>
+          <a:prstGeom prst="rect">
+            <a:avLst/>
+          </a:prstGeom>
+        </p:spPr>
+      </p:pic>
     </p:spTree>
   </p:cSld>
   <p:clrMapOvr>
@@ -3902,13 +4104,13 @@
         <p:spPr>
           <a:xfrm>
             <a:off x="0" y="0"/>
-            <a:ext cx="12191695" cy="6858000"/>
+            <a:ext cx="12188952" cy="6858000"/>
           </a:xfrm>
           <a:prstGeom prst="rect">
             <a:avLst/>
           </a:prstGeom>
           <a:solidFill>
-            <a:srgbClr val="F9F9FA"/>
+            <a:srgbClr val="F8FAFC"/>
           </a:solidFill>
           <a:ln>
             <a:noFill/>
@@ -3944,8 +4146,8 @@
         </p:nvSpPr>
         <p:spPr>
           <a:xfrm>
-            <a:off x="731520" y="457200"/>
-            <a:ext cx="10698480" cy="365760"/>
+            <a:off x="731520" y="320040"/>
+            <a:ext cx="7315200" cy="320040"/>
           </a:xfrm>
           <a:prstGeom prst="rect">
             <a:avLst/>
@@ -3953,7 +4155,7 @@
           <a:noFill/>
         </p:spPr>
         <p:txBody>
-          <a:bodyPr wrap="square" lIns="0" tIns="0" rIns="0" bIns="0">
+          <a:bodyPr wrap="square">
             <a:spAutoFit/>
           </a:bodyPr>
           <a:lstStyle/>
@@ -3961,13 +4163,12 @@
             <a:pPr>
               <a:defRPr sz="1100" b="1">
                 <a:solidFill>
-                  <a:srgbClr val="1E3A8A"/>
-                </a:solidFill>
-                <a:latin typeface="Segoe UI"/>
-              </a:defRPr>
-            </a:pPr>
-            <a:r>
-              <a:t>02. KIẾN TRÚC &amp; CÔNG NGHỆ</a:t>
+                  <a:srgbClr val="2563EB"/>
+                </a:solidFill>
+              </a:defRPr>
+            </a:pPr>
+            <a:r>
+              <a:t>MÀN HÌNH 02</a:t>
             </a:r>
           </a:p>
         </p:txBody>
@@ -3980,8 +4181,8 @@
         </p:nvSpPr>
         <p:spPr>
           <a:xfrm>
-            <a:off x="731520" y="777240"/>
-            <a:ext cx="10698480" cy="640080"/>
+            <a:off x="731520" y="594360"/>
+            <a:ext cx="10515600" cy="502920"/>
           </a:xfrm>
           <a:prstGeom prst="rect">
             <a:avLst/>
@@ -3989,35 +4190,69 @@
           <a:noFill/>
         </p:spPr>
         <p:txBody>
-          <a:bodyPr wrap="square" lIns="0" tIns="0" rIns="0" bIns="0">
+          <a:bodyPr wrap="square">
             <a:spAutoFit/>
           </a:bodyPr>
           <a:lstStyle/>
           <a:p>
             <a:pPr>
-              <a:defRPr sz="2400" b="1">
-                <a:solidFill>
-                  <a:srgbClr val="111827"/>
-                </a:solidFill>
-                <a:latin typeface="Segoe UI"/>
-              </a:defRPr>
-            </a:pPr>
-            <a:r>
-              <a:t>Ngăn Xếp Công Nghệ Hiện Đại (Modern Tech Stack)</a:t>
-            </a:r>
-          </a:p>
-        </p:txBody>
-      </p:sp>
-      <p:sp>
-        <p:nvSpPr>
-          <p:cNvPr id="5" name="Rounded Rectangle 4"/>
+              <a:defRPr sz="2000" b="1">
+                <a:solidFill>
+                  <a:srgbClr val="0F172A"/>
+                </a:solidFill>
+              </a:defRPr>
+            </a:pPr>
+            <a:r>
+              <a:t>Danh Mục Sản Phẩm &amp; Bộ Lọc Đa Chiều</a:t>
+            </a:r>
+          </a:p>
+        </p:txBody>
+      </p:sp>
+      <p:sp>
+        <p:nvSpPr>
+          <p:cNvPr id="5" name="TextBox 4"/>
+          <p:cNvSpPr txBox="1"/>
+          <p:nvPr/>
+        </p:nvSpPr>
+        <p:spPr>
+          <a:xfrm>
+            <a:off x="731520" y="1097280"/>
+            <a:ext cx="10515600" cy="320040"/>
+          </a:xfrm>
+          <a:prstGeom prst="rect">
+            <a:avLst/>
+          </a:prstGeom>
+          <a:noFill/>
+        </p:spPr>
+        <p:txBody>
+          <a:bodyPr wrap="square">
+            <a:spAutoFit/>
+          </a:bodyPr>
+          <a:lstStyle/>
+          <a:p>
+            <a:pPr>
+              <a:defRPr sz="1150">
+                <a:solidFill>
+                  <a:srgbClr val="64748B"/>
+                </a:solidFill>
+              </a:defRPr>
+            </a:pPr>
+            <a:r>
+              <a:t>55 dòng sản phẩm cao cấp, 118 màu có hình studio và lọc thông minh</a:t>
+            </a:r>
+          </a:p>
+        </p:txBody>
+      </p:sp>
+      <p:sp>
+        <p:nvSpPr>
+          <p:cNvPr id="6" name="Rounded Rectangle 5"/>
           <p:cNvSpPr/>
           <p:nvPr/>
         </p:nvSpPr>
         <p:spPr>
           <a:xfrm>
-            <a:off x="731520" y="1645920"/>
-            <a:ext cx="2468880" cy="4480560"/>
+            <a:off x="731520" y="1554480"/>
+            <a:ext cx="4114800" cy="4846320"/>
           </a:xfrm>
           <a:prstGeom prst="roundRect">
             <a:avLst/>
@@ -4027,7 +4262,7 @@
           </a:solidFill>
           <a:ln>
             <a:solidFill>
-              <a:srgbClr val="E2E4E9"/>
+              <a:srgbClr val="E2E8F0"/>
             </a:solidFill>
           </a:ln>
         </p:spPr>
@@ -4046,472 +4281,135 @@
           </a:fontRef>
         </p:style>
         <p:txBody>
-          <a:bodyPr rtlCol="0" anchor="ctr" wrap="square" lIns="228600" rIns="228600" tIns="228600"/>
-          <a:lstStyle/>
-          <a:p>
-            <a:pPr algn="ctr">
-              <a:defRPr sz="1100" b="1">
-                <a:solidFill>
-                  <a:srgbClr val="1E3A8A"/>
-                </a:solidFill>
-              </a:defRPr>
-            </a:pPr>
-            <a:r>
-              <a:t>FRONTEND SHOP</a:t>
-            </a:r>
-          </a:p>
-          <a:p>
-            <a:pPr>
-              <a:defRPr sz="1700" b="1">
-                <a:solidFill>
-                  <a:srgbClr val="111827"/>
-                </a:solidFill>
-              </a:defRPr>
-            </a:pPr>
-            <a:r>
-              <a:t>Giao Diện Khách Hàng</a:t>
-            </a:r>
-          </a:p>
-          <a:p>
-            <a:pPr>
-              <a:defRPr sz="1300" b="1">
-                <a:solidFill>
-                  <a:srgbClr val="1E3A8A"/>
-                </a:solidFill>
-              </a:defRPr>
-            </a:pPr>
-            <a:r>
-              <a:t>Cốt lõi: React 19 + Vite</a:t>
-            </a:r>
-          </a:p>
-          <a:p>
-            <a:pPr>
-              <a:defRPr sz="1200">
-                <a:solidFill>
-                  <a:srgbClr val="6B7280"/>
-                </a:solidFill>
-              </a:defRPr>
-            </a:pPr>
-            <a:r>
-              <a:t>✔ Tailwind CSS v4 tối ưu hiệu năng render.</a:t>
-            </a:r>
-          </a:p>
-          <a:p>
-            <a:pPr>
-              <a:defRPr sz="1200">
-                <a:solidFill>
-                  <a:srgbClr val="6B7280"/>
-                </a:solidFill>
-              </a:defRPr>
-            </a:pPr>
-            <a:r>
-              <a:t>✔ React Router 7 xử lý điều hướng mượt mà.</a:t>
-            </a:r>
-          </a:p>
-          <a:p>
-            <a:pPr>
-              <a:defRPr sz="1200">
-                <a:solidFill>
-                  <a:srgbClr val="6B7280"/>
-                </a:solidFill>
-              </a:defRPr>
-            </a:pPr>
-            <a:r>
-              <a:t>✔ Cơ chế Khóa Checkout chống race-condition &amp; double-order.</a:t>
-            </a:r>
-          </a:p>
-          <a:p>
-            <a:pPr>
-              <a:defRPr sz="1200">
-                <a:solidFill>
-                  <a:srgbClr val="6B7280"/>
-                </a:solidFill>
-              </a:defRPr>
-            </a:pPr>
-            <a:r>
-              <a:t>✔ Sổ địa chỉ đa điểm, thanh toán VietQR &amp; COD.</a:t>
-            </a:r>
-          </a:p>
-        </p:txBody>
-      </p:sp>
-      <p:sp>
-        <p:nvSpPr>
-          <p:cNvPr id="6" name="Rounded Rectangle 5"/>
-          <p:cNvSpPr/>
+          <a:bodyPr rtlCol="0" anchor="ctr"/>
+          <a:lstStyle/>
+          <a:p>
+            <a:pPr algn="ctr"/>
+          </a:p>
+        </p:txBody>
+      </p:sp>
+      <p:sp>
+        <p:nvSpPr>
+          <p:cNvPr id="7" name="TextBox 6"/>
+          <p:cNvSpPr txBox="1"/>
           <p:nvPr/>
         </p:nvSpPr>
         <p:spPr>
           <a:xfrm>
-            <a:off x="3474720" y="1645920"/>
-            <a:ext cx="2468880" cy="4480560"/>
-          </a:xfrm>
-          <a:prstGeom prst="roundRect">
-            <a:avLst/>
-          </a:prstGeom>
-          <a:solidFill>
-            <a:srgbClr val="FFFFFF"/>
-          </a:solidFill>
-          <a:ln>
-            <a:solidFill>
-              <a:srgbClr val="E2E4E9"/>
-            </a:solidFill>
-          </a:ln>
-        </p:spPr>
-        <p:style>
-          <a:lnRef idx="1">
-            <a:schemeClr val="accent1"/>
-          </a:lnRef>
-          <a:fillRef idx="3">
-            <a:schemeClr val="accent1"/>
-          </a:fillRef>
-          <a:effectRef idx="2">
-            <a:schemeClr val="accent1"/>
-          </a:effectRef>
-          <a:fontRef idx="minor">
-            <a:schemeClr val="lt1"/>
-          </a:fontRef>
-        </p:style>
-        <p:txBody>
-          <a:bodyPr rtlCol="0" anchor="ctr" wrap="square" lIns="228600" rIns="228600" tIns="228600"/>
-          <a:lstStyle/>
-          <a:p>
-            <a:pPr algn="ctr">
-              <a:defRPr sz="1100" b="1">
-                <a:solidFill>
-                  <a:srgbClr val="C2985B"/>
-                </a:solidFill>
-              </a:defRPr>
-            </a:pPr>
-            <a:r>
-              <a:t>VIRTUAL TRY-ON</a:t>
-            </a:r>
-          </a:p>
-          <a:p>
-            <a:pPr>
-              <a:defRPr sz="1700" b="1">
-                <a:solidFill>
-                  <a:srgbClr val="111827"/>
-                </a:solidFill>
-              </a:defRPr>
-            </a:pPr>
-            <a:r>
-              <a:t>Phòng Thử Đồ 3D</a:t>
-            </a:r>
-          </a:p>
-          <a:p>
-            <a:pPr>
-              <a:defRPr sz="1300" b="1">
-                <a:solidFill>
-                  <a:srgbClr val="C2985B"/>
-                </a:solidFill>
-              </a:defRPr>
-            </a:pPr>
-            <a:r>
-              <a:t>Cốt lõi: Three.js + R3F</a:t>
-            </a:r>
-          </a:p>
-          <a:p>
-            <a:pPr>
-              <a:defRPr sz="1200">
-                <a:solidFill>
-                  <a:srgbClr val="6B7280"/>
-                </a:solidFill>
-              </a:defRPr>
-            </a:pPr>
-            <a:r>
-              <a:t>✔ WebGL / Three.js kết hợp @react-three/fiber &amp; drei.</a:t>
-            </a:r>
-          </a:p>
-          <a:p>
-            <a:pPr>
-              <a:defRPr sz="1200">
-                <a:solidFill>
-                  <a:srgbClr val="6B7280"/>
-                </a:solidFill>
-              </a:defRPr>
-            </a:pPr>
-            <a:r>
-              <a:t>✔ Rig biến dạng avatar theo số đo người dùng.</a:t>
-            </a:r>
-          </a:p>
-          <a:p>
-            <a:pPr>
-              <a:defRPr sz="1200">
-                <a:solidFill>
-                  <a:srgbClr val="6B7280"/>
-                </a:solidFill>
-              </a:defRPr>
-            </a:pPr>
-            <a:r>
-              <a:t>✔ Hệ thống texture UV nén WebP siêu nhẹ 640px.</a:t>
-            </a:r>
-          </a:p>
-          <a:p>
-            <a:pPr>
-              <a:defRPr sz="1200">
-                <a:solidFill>
-                  <a:srgbClr val="6B7280"/>
-                </a:solidFill>
-              </a:defRPr>
-            </a:pPr>
-            <a:r>
-              <a:t>✔ Tương thích mô hình nữ (F2) &amp; nam (M1).</a:t>
-            </a:r>
-          </a:p>
-        </p:txBody>
-      </p:sp>
-      <p:sp>
-        <p:nvSpPr>
-          <p:cNvPr id="7" name="Rounded Rectangle 6"/>
-          <p:cNvSpPr/>
+            <a:off x="914400" y="1737360"/>
+            <a:ext cx="3749039" cy="4480560"/>
+          </a:xfrm>
+          <a:prstGeom prst="rect">
+            <a:avLst/>
+          </a:prstGeom>
+          <a:noFill/>
+        </p:spPr>
+        <p:txBody>
+          <a:bodyPr wrap="square">
+            <a:spAutoFit/>
+          </a:bodyPr>
+          <a:lstStyle/>
+          <a:p>
+            <a:pPr>
+              <a:spcAft>
+                <a:spcPts val="1200"/>
+              </a:spcAft>
+              <a:defRPr sz="1200" b="1">
+                <a:solidFill>
+                  <a:srgbClr val="2563EB"/>
+                </a:solidFill>
+              </a:defRPr>
+            </a:pPr>
+            <a:r>
+              <a:t>CÁC ĐIỂM NỔI BẬT</a:t>
+            </a:r>
+          </a:p>
+          <a:p>
+            <a:pPr>
+              <a:spcAft>
+                <a:spcPts val="800"/>
+              </a:spcAft>
+              <a:defRPr sz="1050">
+                <a:solidFill>
+                  <a:srgbClr val="1E293B"/>
+                </a:solidFill>
+              </a:defRPr>
+            </a:pPr>
+            <a:r>
+              <a:t>✔ Kho sản phẩm lớn: 55 dòng thời trang cao cấp với 118 biến thể màu.</a:t>
+            </a:r>
+          </a:p>
+          <a:p>
+            <a:pPr>
+              <a:spcAft>
+                <a:spcPts val="800"/>
+              </a:spcAft>
+              <a:defRPr sz="1050">
+                <a:solidFill>
+                  <a:srgbClr val="1E293B"/>
+                </a:solidFill>
+              </a:defRPr>
+            </a:pPr>
+            <a:r>
+              <a:t>✔ Bộ lọc kích thước: Lọc nhanh theo size S, M, L, XL.</a:t>
+            </a:r>
+          </a:p>
+          <a:p>
+            <a:pPr>
+              <a:spcAft>
+                <a:spcPts val="800"/>
+              </a:spcAft>
+              <a:defRPr sz="1050">
+                <a:solidFill>
+                  <a:srgbClr val="1E293B"/>
+                </a:solidFill>
+              </a:defRPr>
+            </a:pPr>
+            <a:r>
+              <a:t>✔ Bộ lọc mức giá: Kéo thanh trượt chọn khoảng giá mong muốn.</a:t>
+            </a:r>
+          </a:p>
+          <a:p>
+            <a:pPr>
+              <a:spcAft>
+                <a:spcPts val="800"/>
+              </a:spcAft>
+              <a:defRPr sz="1050">
+                <a:solidFill>
+                  <a:srgbClr val="1E293B"/>
+                </a:solidFill>
+              </a:defRPr>
+            </a:pPr>
+            <a:r>
+              <a:t>✔ Lưới hiển thị sản phẩm trực quan, hiển thị tag giá và màu sắc sắc nét.</a:t>
+            </a:r>
+          </a:p>
+        </p:txBody>
+      </p:sp>
+      <p:pic>
+        <p:nvPicPr>
+          <p:cNvPr id="8" name="Picture 7" descr="shot_02_catalog.png"/>
+          <p:cNvPicPr>
+            <a:picLocks noChangeAspect="1"/>
+          </p:cNvPicPr>
           <p:nvPr/>
-        </p:nvSpPr>
-        <p:spPr>
-          <a:xfrm>
-            <a:off x="6217920" y="1645920"/>
-            <a:ext cx="2468880" cy="4480560"/>
-          </a:xfrm>
-          <a:prstGeom prst="roundRect">
-            <a:avLst/>
-          </a:prstGeom>
-          <a:solidFill>
-            <a:srgbClr val="FFFFFF"/>
-          </a:solidFill>
-          <a:ln>
-            <a:solidFill>
-              <a:srgbClr val="E2E4E9"/>
-            </a:solidFill>
-          </a:ln>
-        </p:spPr>
-        <p:style>
-          <a:lnRef idx="1">
-            <a:schemeClr val="accent1"/>
-          </a:lnRef>
-          <a:fillRef idx="3">
-            <a:schemeClr val="accent1"/>
-          </a:fillRef>
-          <a:effectRef idx="2">
-            <a:schemeClr val="accent1"/>
-          </a:effectRef>
-          <a:fontRef idx="minor">
-            <a:schemeClr val="lt1"/>
-          </a:fontRef>
-        </p:style>
-        <p:txBody>
-          <a:bodyPr rtlCol="0" anchor="ctr" wrap="square" lIns="228600" rIns="228600" tIns="228600"/>
-          <a:lstStyle/>
-          <a:p>
-            <a:pPr algn="ctr">
-              <a:defRPr sz="1100" b="1">
-                <a:solidFill>
-                  <a:srgbClr val="2563EB"/>
-                </a:solidFill>
-              </a:defRPr>
-            </a:pPr>
-            <a:r>
-              <a:t>BACKEND API</a:t>
-            </a:r>
-          </a:p>
-          <a:p>
-            <a:pPr>
-              <a:defRPr sz="1700" b="1">
-                <a:solidFill>
-                  <a:srgbClr val="111827"/>
-                </a:solidFill>
-              </a:defRPr>
-            </a:pPr>
-            <a:r>
-              <a:t>Máy Chủ Nghiệp Vụ</a:t>
-            </a:r>
-          </a:p>
-          <a:p>
-            <a:pPr>
-              <a:defRPr sz="1300" b="1">
-                <a:solidFill>
-                  <a:srgbClr val="2563EB"/>
-                </a:solidFill>
-              </a:defRPr>
-            </a:pPr>
-            <a:r>
-              <a:t>Cốt lõi: FastAPI + Python</a:t>
-            </a:r>
-          </a:p>
-          <a:p>
-            <a:pPr>
-              <a:defRPr sz="1200">
-                <a:solidFill>
-                  <a:srgbClr val="6B7280"/>
-                </a:solidFill>
-              </a:defRPr>
-            </a:pPr>
-            <a:r>
-              <a:t>✔ FastAPI hiệu năng cao, bất đồng bộ (async).</a:t>
-            </a:r>
-          </a:p>
-          <a:p>
-            <a:pPr>
-              <a:defRPr sz="1200">
-                <a:solidFill>
-                  <a:srgbClr val="6B7280"/>
-                </a:solidFill>
-              </a:defRPr>
-            </a:pPr>
-            <a:r>
-              <a:t>✔ SQLAlchemy 2.0 ORM quản lý dữ liệu.</a:t>
-            </a:r>
-          </a:p>
-          <a:p>
-            <a:pPr>
-              <a:defRPr sz="1200">
-                <a:solidFill>
-                  <a:srgbClr val="6B7280"/>
-                </a:solidFill>
-              </a:defRPr>
-            </a:pPr>
-            <a:r>
-              <a:t>✔ SQLite local / PostgreSQL Supabase.</a:t>
-            </a:r>
-          </a:p>
-          <a:p>
-            <a:pPr>
-              <a:defRPr sz="1200">
-                <a:solidFill>
-                  <a:srgbClr val="6B7280"/>
-                </a:solidFill>
-              </a:defRPr>
-            </a:pPr>
-            <a:r>
-              <a:t>✔ Kiểm thử tự động 78 test cases bảo đảm toàn vẹn.</a:t>
-            </a:r>
-          </a:p>
-        </p:txBody>
-      </p:sp>
-      <p:sp>
-        <p:nvSpPr>
-          <p:cNvPr id="8" name="Rounded Rectangle 7"/>
-          <p:cNvSpPr/>
-          <p:nvPr/>
-        </p:nvSpPr>
-        <p:spPr>
-          <a:xfrm>
-            <a:off x="8961120" y="1645920"/>
-            <a:ext cx="2468880" cy="4480560"/>
-          </a:xfrm>
-          <a:prstGeom prst="roundRect">
-            <a:avLst/>
-          </a:prstGeom>
-          <a:solidFill>
-            <a:srgbClr val="FFFFFF"/>
-          </a:solidFill>
-          <a:ln>
-            <a:solidFill>
-              <a:srgbClr val="E2E4E9"/>
-            </a:solidFill>
-          </a:ln>
-        </p:spPr>
-        <p:style>
-          <a:lnRef idx="1">
-            <a:schemeClr val="accent1"/>
-          </a:lnRef>
-          <a:fillRef idx="3">
-            <a:schemeClr val="accent1"/>
-          </a:fillRef>
-          <a:effectRef idx="2">
-            <a:schemeClr val="accent1"/>
-          </a:effectRef>
-          <a:fontRef idx="minor">
-            <a:schemeClr val="lt1"/>
-          </a:fontRef>
-        </p:style>
-        <p:txBody>
-          <a:bodyPr rtlCol="0" anchor="ctr" wrap="square" lIns="228600" rIns="228600" tIns="228600"/>
-          <a:lstStyle/>
-          <a:p>
-            <a:pPr algn="ctr">
-              <a:defRPr sz="1100" b="1">
-                <a:solidFill>
-                  <a:srgbClr val="059669"/>
-                </a:solidFill>
-              </a:defRPr>
-            </a:pPr>
-            <a:r>
-              <a:t>INTEGRATION</a:t>
-            </a:r>
-          </a:p>
-          <a:p>
-            <a:pPr>
-              <a:defRPr sz="1700" b="1">
-                <a:solidFill>
-                  <a:srgbClr val="111827"/>
-                </a:solidFill>
-              </a:defRPr>
-            </a:pPr>
-            <a:r>
-              <a:t>Xác Thực &amp; Đối Tác</a:t>
-            </a:r>
-          </a:p>
-          <a:p>
-            <a:pPr>
-              <a:defRPr sz="1300" b="1">
-                <a:solidFill>
-                  <a:srgbClr val="059669"/>
-                </a:solidFill>
-              </a:defRPr>
-            </a:pPr>
-            <a:r>
-              <a:t>Cốt lõi: Supabase + GHN API</a:t>
-            </a:r>
-          </a:p>
-          <a:p>
-            <a:pPr>
-              <a:defRPr sz="1200">
-                <a:solidFill>
-                  <a:srgbClr val="6B7280"/>
-                </a:solidFill>
-              </a:defRPr>
-            </a:pPr>
-            <a:r>
-              <a:t>✔ Supabase Auth xác thực JWT bảo mật phân quyền admin.</a:t>
-            </a:r>
-          </a:p>
-          <a:p>
-            <a:pPr>
-              <a:defRPr sz="1200">
-                <a:solidFill>
-                  <a:srgbClr val="6B7280"/>
-                </a:solidFill>
-              </a:defRPr>
-            </a:pPr>
-            <a:r>
-              <a:t>✔ GHN API Gateway Sandbox tự động tạo vận đơn bưu cục.</a:t>
-            </a:r>
-          </a:p>
-          <a:p>
-            <a:pPr>
-              <a:defRPr sz="1200">
-                <a:solidFill>
-                  <a:srgbClr val="6B7280"/>
-                </a:solidFill>
-              </a:defRPr>
-            </a:pPr>
-            <a:r>
-              <a:t>✔ VietQR API sinh mã thanh toán ngân hàng động.</a:t>
-            </a:r>
-          </a:p>
-          <a:p>
-            <a:pPr>
-              <a:defRPr sz="1200">
-                <a:solidFill>
-                  <a:srgbClr val="6B7280"/>
-                </a:solidFill>
-              </a:defRPr>
-            </a:pPr>
-            <a:r>
-              <a:t>✔ CSS Print Engine xuất phiếu giao hàng &amp; hóa đơn A4.</a:t>
-            </a:r>
-          </a:p>
-        </p:txBody>
-      </p:sp>
+        </p:nvPicPr>
+        <p:blipFill>
+          <a:blip r:embed="rId2"/>
+          <a:stretch>
+            <a:fillRect/>
+          </a:stretch>
+        </p:blipFill>
+        <p:spPr>
+          <a:xfrm>
+            <a:off x="5029200" y="1554480"/>
+            <a:ext cx="6400800" cy="4846320"/>
+          </a:xfrm>
+          <a:prstGeom prst="rect">
+            <a:avLst/>
+          </a:prstGeom>
+        </p:spPr>
+      </p:pic>
     </p:spTree>
   </p:cSld>
   <p:clrMapOvr>
@@ -4539,13 +4437,13 @@
         <p:spPr>
           <a:xfrm>
             <a:off x="0" y="0"/>
-            <a:ext cx="12191695" cy="6858000"/>
+            <a:ext cx="12188952" cy="6858000"/>
           </a:xfrm>
           <a:prstGeom prst="rect">
             <a:avLst/>
           </a:prstGeom>
           <a:solidFill>
-            <a:srgbClr val="F9F9FA"/>
+            <a:srgbClr val="F8FAFC"/>
           </a:solidFill>
           <a:ln>
             <a:noFill/>
@@ -4581,8 +4479,8 @@
         </p:nvSpPr>
         <p:spPr>
           <a:xfrm>
-            <a:off x="731520" y="457200"/>
-            <a:ext cx="10698480" cy="365760"/>
+            <a:off x="731520" y="320040"/>
+            <a:ext cx="7315200" cy="320040"/>
           </a:xfrm>
           <a:prstGeom prst="rect">
             <a:avLst/>
@@ -4590,7 +4488,7 @@
           <a:noFill/>
         </p:spPr>
         <p:txBody>
-          <a:bodyPr wrap="square" lIns="0" tIns="0" rIns="0" bIns="0">
+          <a:bodyPr wrap="square">
             <a:spAutoFit/>
           </a:bodyPr>
           <a:lstStyle/>
@@ -4598,13 +4496,12 @@
             <a:pPr>
               <a:defRPr sz="1100" b="1">
                 <a:solidFill>
-                  <a:srgbClr val="1E3A8A"/>
-                </a:solidFill>
-                <a:latin typeface="Segoe UI"/>
-              </a:defRPr>
-            </a:pPr>
-            <a:r>
-              <a:t>03. KẾT QUẢ THỰC HIỆN</a:t>
+                  <a:srgbClr val="2563EB"/>
+                </a:solidFill>
+              </a:defRPr>
+            </a:pPr>
+            <a:r>
+              <a:t>MÀN HÌNH 03</a:t>
             </a:r>
           </a:p>
         </p:txBody>
@@ -4617,8 +4514,8 @@
         </p:nvSpPr>
         <p:spPr>
           <a:xfrm>
-            <a:off x="731520" y="777240"/>
-            <a:ext cx="10698480" cy="640080"/>
+            <a:off x="731520" y="594360"/>
+            <a:ext cx="10515600" cy="502920"/>
           </a:xfrm>
           <a:prstGeom prst="rect">
             <a:avLst/>
@@ -4626,35 +4523,69 @@
           <a:noFill/>
         </p:spPr>
         <p:txBody>
-          <a:bodyPr wrap="square" lIns="0" tIns="0" rIns="0" bIns="0">
+          <a:bodyPr wrap="square">
             <a:spAutoFit/>
           </a:bodyPr>
           <a:lstStyle/>
           <a:p>
             <a:pPr>
-              <a:defRPr sz="2400" b="1">
-                <a:solidFill>
-                  <a:srgbClr val="111827"/>
-                </a:solidFill>
-                <a:latin typeface="Segoe UI"/>
-              </a:defRPr>
-            </a:pPr>
-            <a:r>
-              <a:t>Bốn Trụ Cột Tính Năng Cốt Lõi Đã Hoàn Thiện</a:t>
-            </a:r>
-          </a:p>
-        </p:txBody>
-      </p:sp>
-      <p:sp>
-        <p:nvSpPr>
-          <p:cNvPr id="5" name="Rounded Rectangle 4"/>
+              <a:defRPr sz="2000" b="1">
+                <a:solidFill>
+                  <a:srgbClr val="0F172A"/>
+                </a:solidFill>
+              </a:defRPr>
+            </a:pPr>
+            <a:r>
+              <a:t>Trang Chi Tiết Sản Phẩm &amp; Nút Thử Đồ 3D</a:t>
+            </a:r>
+          </a:p>
+        </p:txBody>
+      </p:sp>
+      <p:sp>
+        <p:nvSpPr>
+          <p:cNvPr id="5" name="TextBox 4"/>
+          <p:cNvSpPr txBox="1"/>
+          <p:nvPr/>
+        </p:nvSpPr>
+        <p:spPr>
+          <a:xfrm>
+            <a:off x="731520" y="1097280"/>
+            <a:ext cx="10515600" cy="320040"/>
+          </a:xfrm>
+          <a:prstGeom prst="rect">
+            <a:avLst/>
+          </a:prstGeom>
+          <a:noFill/>
+        </p:spPr>
+        <p:txBody>
+          <a:bodyPr wrap="square">
+            <a:spAutoFit/>
+          </a:bodyPr>
+          <a:lstStyle/>
+          <a:p>
+            <a:pPr>
+              <a:defRPr sz="1150">
+                <a:solidFill>
+                  <a:srgbClr val="64748B"/>
+                </a:solidFill>
+              </a:defRPr>
+            </a:pPr>
+            <a:r>
+              <a:t>Thông tin chất liệu, chọn màu sắc thời gian thực và liên kết phòng thử 3D</a:t>
+            </a:r>
+          </a:p>
+        </p:txBody>
+      </p:sp>
+      <p:sp>
+        <p:nvSpPr>
+          <p:cNvPr id="6" name="Rounded Rectangle 5"/>
           <p:cNvSpPr/>
           <p:nvPr/>
         </p:nvSpPr>
         <p:spPr>
           <a:xfrm>
-            <a:off x="731520" y="1645920"/>
-            <a:ext cx="5212080" cy="2103120"/>
+            <a:off x="731520" y="1554480"/>
+            <a:ext cx="4114800" cy="4846320"/>
           </a:xfrm>
           <a:prstGeom prst="roundRect">
             <a:avLst/>
@@ -4664,7 +4595,7 @@
           </a:solidFill>
           <a:ln>
             <a:solidFill>
-              <a:srgbClr val="E2E4E9"/>
+              <a:srgbClr val="E2E8F0"/>
             </a:solidFill>
           </a:ln>
         </p:spPr>
@@ -4683,328 +4614,135 @@
           </a:fontRef>
         </p:style>
         <p:txBody>
-          <a:bodyPr rtlCol="0" anchor="ctr" wrap="square" lIns="228600" rIns="228600" tIns="228600"/>
-          <a:lstStyle/>
-          <a:p>
-            <a:pPr algn="ctr">
-              <a:defRPr sz="1400" b="1">
-                <a:solidFill>
-                  <a:srgbClr val="1E3A8A"/>
-                </a:solidFill>
-              </a:defRPr>
-            </a:pPr>
-            <a:r>
-              <a:t>1. DANH MỤC THỜI TRANG &amp; DỮ LIỆU ĐỒ SỘ</a:t>
-            </a:r>
-          </a:p>
-          <a:p>
-            <a:pPr>
-              <a:defRPr sz="1200">
-                <a:solidFill>
-                  <a:srgbClr val="6B7280"/>
-                </a:solidFill>
-              </a:defRPr>
-            </a:pPr>
-            <a:r>
-              <a:t>• 55 dòng sản phẩm cao cấp, 118 biến thể màu sắc có ảnh studio trước/sau.</a:t>
-            </a:r>
-          </a:p>
-          <a:p>
-            <a:pPr>
-              <a:defRPr sz="1200">
-                <a:solidFill>
-                  <a:srgbClr val="6B7280"/>
-                </a:solidFill>
-              </a:defRPr>
-            </a:pPr>
-            <a:r>
-              <a:t>• Phân loại chuyên nghiệp: Áo sơ mi, Áo thun nam/nữ, Quần dài, Quần short, Chân váy.</a:t>
-            </a:r>
-          </a:p>
-          <a:p>
-            <a:pPr>
-              <a:defRPr sz="1200">
-                <a:solidFill>
-                  <a:srgbClr val="6B7280"/>
-                </a:solidFill>
-              </a:defRPr>
-            </a:pPr>
-            <a:r>
-              <a:t>• Lọc sản phẩm đa chiều theo kích thước, bảng màu và khoảng giá.</a:t>
-            </a:r>
-          </a:p>
-        </p:txBody>
-      </p:sp>
-      <p:sp>
-        <p:nvSpPr>
-          <p:cNvPr id="6" name="Rounded Rectangle 5"/>
-          <p:cNvSpPr/>
+          <a:bodyPr rtlCol="0" anchor="ctr"/>
+          <a:lstStyle/>
+          <a:p>
+            <a:pPr algn="ctr"/>
+          </a:p>
+        </p:txBody>
+      </p:sp>
+      <p:sp>
+        <p:nvSpPr>
+          <p:cNvPr id="7" name="TextBox 6"/>
+          <p:cNvSpPr txBox="1"/>
           <p:nvPr/>
         </p:nvSpPr>
         <p:spPr>
           <a:xfrm>
-            <a:off x="6217920" y="1645920"/>
-            <a:ext cx="5212080" cy="2103120"/>
-          </a:xfrm>
-          <a:prstGeom prst="roundRect">
-            <a:avLst/>
-          </a:prstGeom>
-          <a:solidFill>
-            <a:srgbClr val="FFFFFF"/>
-          </a:solidFill>
-          <a:ln>
-            <a:solidFill>
-              <a:srgbClr val="E2E4E9"/>
-            </a:solidFill>
-          </a:ln>
-        </p:spPr>
-        <p:style>
-          <a:lnRef idx="1">
-            <a:schemeClr val="accent1"/>
-          </a:lnRef>
-          <a:fillRef idx="3">
-            <a:schemeClr val="accent1"/>
-          </a:fillRef>
-          <a:effectRef idx="2">
-            <a:schemeClr val="accent1"/>
-          </a:effectRef>
-          <a:fontRef idx="minor">
-            <a:schemeClr val="lt1"/>
-          </a:fontRef>
-        </p:style>
-        <p:txBody>
-          <a:bodyPr rtlCol="0" anchor="ctr" wrap="square" lIns="228600" rIns="228600" tIns="228600"/>
-          <a:lstStyle/>
-          <a:p>
-            <a:pPr algn="ctr">
-              <a:defRPr sz="1400" b="1">
-                <a:solidFill>
-                  <a:srgbClr val="C2985B"/>
-                </a:solidFill>
-              </a:defRPr>
-            </a:pPr>
-            <a:r>
-              <a:t>2. TRỢ LÝ AI STYLIST &amp; COMBO CÁ NHÂN HÓA (GEMINI LLM)</a:t>
-            </a:r>
-          </a:p>
-          <a:p>
-            <a:pPr>
-              <a:defRPr sz="1200">
-                <a:solidFill>
-                  <a:srgbClr val="6B7280"/>
-                </a:solidFill>
-              </a:defRPr>
-            </a:pPr>
-            <a:r>
-              <a:t>• Tích hợp Chatbox AI Stylist độc quyền, kết nối mô hình ngôn ngữ lớn Google Gemini.</a:t>
-            </a:r>
-          </a:p>
-          <a:p>
-            <a:pPr>
-              <a:defRPr sz="1200">
-                <a:solidFill>
-                  <a:srgbClr val="6B7280"/>
-                </a:solidFill>
-              </a:defRPr>
-            </a:pPr>
-            <a:r>
-              <a:t>• Cá nhân hóa đa nguồn: Số đo nhân trắc + Lịch sử tìm kiếm gần nhất + Lịch sử đơn hàng đã đặt (phối chéo tủ đồ cũ).</a:t>
-            </a:r>
-          </a:p>
-          <a:p>
-            <a:pPr>
-              <a:defRPr sz="1200">
-                <a:solidFill>
-                  <a:srgbClr val="6B7280"/>
-                </a:solidFill>
-              </a:defRPr>
-            </a:pPr>
-            <a:r>
-              <a:t>• Tự động sinh Thẻ Combo Mua Sắm Thương Mại (Áo + Quần) với ảnh thật, giá thật, 1 nút 'Thêm giỏ' &amp; 'Mua ngay'.</a:t>
-            </a:r>
-          </a:p>
-        </p:txBody>
-      </p:sp>
-      <p:sp>
-        <p:nvSpPr>
-          <p:cNvPr id="7" name="Rounded Rectangle 6"/>
-          <p:cNvSpPr/>
+            <a:off x="914400" y="1737360"/>
+            <a:ext cx="3749039" cy="4480560"/>
+          </a:xfrm>
+          <a:prstGeom prst="rect">
+            <a:avLst/>
+          </a:prstGeom>
+          <a:noFill/>
+        </p:spPr>
+        <p:txBody>
+          <a:bodyPr wrap="square">
+            <a:spAutoFit/>
+          </a:bodyPr>
+          <a:lstStyle/>
+          <a:p>
+            <a:pPr>
+              <a:spcAft>
+                <a:spcPts val="1200"/>
+              </a:spcAft>
+              <a:defRPr sz="1200" b="1">
+                <a:solidFill>
+                  <a:srgbClr val="2563EB"/>
+                </a:solidFill>
+              </a:defRPr>
+            </a:pPr>
+            <a:r>
+              <a:t>CÁC ĐIỂM NỔI BẬT</a:t>
+            </a:r>
+          </a:p>
+          <a:p>
+            <a:pPr>
+              <a:spcAft>
+                <a:spcPts val="800"/>
+              </a:spcAft>
+              <a:defRPr sz="1050">
+                <a:solidFill>
+                  <a:srgbClr val="1E293B"/>
+                </a:solidFill>
+              </a:defRPr>
+            </a:pPr>
+            <a:r>
+              <a:t>✔ Ảnh chụp studio phóng to chi tiết góc trước và góc sau sản phẩm.</a:t>
+            </a:r>
+          </a:p>
+          <a:p>
+            <a:pPr>
+              <a:spcAft>
+                <a:spcPts val="800"/>
+              </a:spcAft>
+              <a:defRPr sz="1050">
+                <a:solidFill>
+                  <a:srgbClr val="1E293B"/>
+                </a:solidFill>
+              </a:defRPr>
+            </a:pPr>
+            <a:r>
+              <a:t>✔ Bảng chọn biến thể màu sắc (Color Swatches) trực quan.</a:t>
+            </a:r>
+          </a:p>
+          <a:p>
+            <a:pPr>
+              <a:spcAft>
+                <a:spcPts val="800"/>
+              </a:spcAft>
+              <a:defRPr sz="1050">
+                <a:solidFill>
+                  <a:srgbClr val="1E293B"/>
+                </a:solidFill>
+              </a:defRPr>
+            </a:pPr>
+            <a:r>
+              <a:t>✔ Nút chọn size S / M / L / XL kèm hướng dẫn kích cỡ.</a:t>
+            </a:r>
+          </a:p>
+          <a:p>
+            <a:pPr>
+              <a:spcAft>
+                <a:spcPts val="800"/>
+              </a:spcAft>
+              <a:defRPr sz="1050">
+                <a:solidFill>
+                  <a:srgbClr val="1E293B"/>
+                </a:solidFill>
+              </a:defRPr>
+            </a:pPr>
+            <a:r>
+              <a:t>✔ Nút 'Thử đồ 3D': Chuyển ngay sản phẩm sang phòng thử đồ 3D để ướm thử.</a:t>
+            </a:r>
+          </a:p>
+        </p:txBody>
+      </p:sp>
+      <p:pic>
+        <p:nvPicPr>
+          <p:cNvPr id="8" name="Picture 7" descr="shot_03_detail.png"/>
+          <p:cNvPicPr>
+            <a:picLocks noChangeAspect="1"/>
+          </p:cNvPicPr>
           <p:nvPr/>
-        </p:nvSpPr>
-        <p:spPr>
-          <a:xfrm>
-            <a:off x="731520" y="4023360"/>
-            <a:ext cx="5212080" cy="2103120"/>
-          </a:xfrm>
-          <a:prstGeom prst="roundRect">
-            <a:avLst/>
-          </a:prstGeom>
-          <a:solidFill>
-            <a:srgbClr val="FFFFFF"/>
-          </a:solidFill>
-          <a:ln>
-            <a:solidFill>
-              <a:srgbClr val="E2E4E9"/>
-            </a:solidFill>
-          </a:ln>
-        </p:spPr>
-        <p:style>
-          <a:lnRef idx="1">
-            <a:schemeClr val="accent1"/>
-          </a:lnRef>
-          <a:fillRef idx="3">
-            <a:schemeClr val="accent1"/>
-          </a:fillRef>
-          <a:effectRef idx="2">
-            <a:schemeClr val="accent1"/>
-          </a:effectRef>
-          <a:fontRef idx="minor">
-            <a:schemeClr val="lt1"/>
-          </a:fontRef>
-        </p:style>
-        <p:txBody>
-          <a:bodyPr rtlCol="0" anchor="ctr" wrap="square" lIns="228600" rIns="228600" tIns="228600"/>
-          <a:lstStyle/>
-          <a:p>
-            <a:pPr algn="ctr">
-              <a:defRPr sz="1400" b="1">
-                <a:solidFill>
-                  <a:srgbClr val="2563EB"/>
-                </a:solidFill>
-              </a:defRPr>
-            </a:pPr>
-            <a:r>
-              <a:t>3. PHÒNG THỬ ĐỒ 3D TRỰC QUAN (VIRTUAL TRY-ON)</a:t>
-            </a:r>
-          </a:p>
-          <a:p>
-            <a:pPr>
-              <a:defRPr sz="1200">
-                <a:solidFill>
-                  <a:srgbClr val="6B7280"/>
-                </a:solidFill>
-              </a:defRPr>
-            </a:pPr>
-            <a:r>
-              <a:t>• Thử đồ trực tiếp trên mô hình 3D: Áo thun, Sơ mi Oxford/Check, Quần dài, Chân váy.</a:t>
-            </a:r>
-          </a:p>
-          <a:p>
-            <a:pPr>
-              <a:defRPr sz="1200">
-                <a:solidFill>
-                  <a:srgbClr val="6B7280"/>
-                </a:solidFill>
-              </a:defRPr>
-            </a:pPr>
-            <a:r>
-              <a:t>• Thay đổi góc nhìn 360 độ, điều chỉnh dáng pose (đứng thẳng, tự nhiên).</a:t>
-            </a:r>
-          </a:p>
-          <a:p>
-            <a:pPr>
-              <a:defRPr sz="1200">
-                <a:solidFill>
-                  <a:srgbClr val="6B7280"/>
-                </a:solidFill>
-              </a:defRPr>
-            </a:pPr>
-            <a:r>
-              <a:t>• Tự động cảnh báo độ chật/vừa vặn (Tight/Fit) theo số đo của cơ thể.</a:t>
-            </a:r>
-          </a:p>
-        </p:txBody>
-      </p:sp>
-      <p:sp>
-        <p:nvSpPr>
-          <p:cNvPr id="8" name="Rounded Rectangle 7"/>
-          <p:cNvSpPr/>
-          <p:nvPr/>
-        </p:nvSpPr>
-        <p:spPr>
-          <a:xfrm>
-            <a:off x="6217920" y="4023360"/>
-            <a:ext cx="5212080" cy="2103120"/>
-          </a:xfrm>
-          <a:prstGeom prst="roundRect">
-            <a:avLst/>
-          </a:prstGeom>
-          <a:solidFill>
-            <a:srgbClr val="FFFFFF"/>
-          </a:solidFill>
-          <a:ln>
-            <a:solidFill>
-              <a:srgbClr val="E2E4E9"/>
-            </a:solidFill>
-          </a:ln>
-        </p:spPr>
-        <p:style>
-          <a:lnRef idx="1">
-            <a:schemeClr val="accent1"/>
-          </a:lnRef>
-          <a:fillRef idx="3">
-            <a:schemeClr val="accent1"/>
-          </a:fillRef>
-          <a:effectRef idx="2">
-            <a:schemeClr val="accent1"/>
-          </a:effectRef>
-          <a:fontRef idx="minor">
-            <a:schemeClr val="lt1"/>
-          </a:fontRef>
-        </p:style>
-        <p:txBody>
-          <a:bodyPr rtlCol="0" anchor="ctr" wrap="square" lIns="228600" rIns="228600" tIns="228600"/>
-          <a:lstStyle/>
-          <a:p>
-            <a:pPr algn="ctr">
-              <a:defRPr sz="1400" b="1">
-                <a:solidFill>
-                  <a:srgbClr val="059669"/>
-                </a:solidFill>
-              </a:defRPr>
-            </a:pPr>
-            <a:r>
-              <a:t>4. VẬN HÀNH LOGISTICS GHN &amp; IN PHIẾU GIAO HÀNG</a:t>
-            </a:r>
-          </a:p>
-          <a:p>
-            <a:pPr>
-              <a:defRPr sz="1200">
-                <a:solidFill>
-                  <a:srgbClr val="6B7280"/>
-                </a:solidFill>
-              </a:defRPr>
-            </a:pPr>
-            <a:r>
-              <a:t>• Tích hợp API bưu cục GHN: 1 nút tự động tạo vận đơn bưu cục thật trên hệ thống bưu điện.</a:t>
-            </a:r>
-          </a:p>
-          <a:p>
-            <a:pPr>
-              <a:defRPr sz="1200">
-                <a:solidFill>
-                  <a:srgbClr val="6B7280"/>
-                </a:solidFill>
-              </a:defRPr>
-            </a:pPr>
-            <a:r>
-              <a:t>• In phiếu đóng hàng &amp; hóa đơn A4/A5 chuẩn bưu điện, mã vạch SVG, ô thu tiền COD nổi bật.</a:t>
-            </a:r>
-          </a:p>
-          <a:p>
-            <a:pPr>
-              <a:defRPr sz="1200">
-                <a:solidFill>
-                  <a:srgbClr val="6B7280"/>
-                </a:solidFill>
-              </a:defRPr>
-            </a:pPr>
-            <a:r>
-              <a:t>• Tra cứu lộ trình đơn hàng trực tiếp qua liên kết hãng vận chuyển.</a:t>
-            </a:r>
-          </a:p>
-        </p:txBody>
-      </p:sp>
+        </p:nvPicPr>
+        <p:blipFill>
+          <a:blip r:embed="rId2"/>
+          <a:stretch>
+            <a:fillRect/>
+          </a:stretch>
+        </p:blipFill>
+        <p:spPr>
+          <a:xfrm>
+            <a:off x="5029200" y="1554480"/>
+            <a:ext cx="6400800" cy="4846320"/>
+          </a:xfrm>
+          <a:prstGeom prst="rect">
+            <a:avLst/>
+          </a:prstGeom>
+        </p:spPr>
+      </p:pic>
     </p:spTree>
   </p:cSld>
   <p:clrMapOvr>
@@ -5032,13 +4770,13 @@
         <p:spPr>
           <a:xfrm>
             <a:off x="0" y="0"/>
-            <a:ext cx="12191695" cy="6858000"/>
+            <a:ext cx="12188952" cy="6858000"/>
           </a:xfrm>
           <a:prstGeom prst="rect">
             <a:avLst/>
           </a:prstGeom>
           <a:solidFill>
-            <a:srgbClr val="F9F9FA"/>
+            <a:srgbClr val="F8FAFC"/>
           </a:solidFill>
           <a:ln>
             <a:noFill/>
@@ -5074,8 +4812,8 @@
         </p:nvSpPr>
         <p:spPr>
           <a:xfrm>
-            <a:off x="731520" y="457200"/>
-            <a:ext cx="10698480" cy="365760"/>
+            <a:off x="731520" y="320040"/>
+            <a:ext cx="7315200" cy="320040"/>
           </a:xfrm>
           <a:prstGeom prst="rect">
             <a:avLst/>
@@ -5083,7 +4821,7 @@
           <a:noFill/>
         </p:spPr>
         <p:txBody>
-          <a:bodyPr wrap="square" lIns="0" tIns="0" rIns="0" bIns="0">
+          <a:bodyPr wrap="square">
             <a:spAutoFit/>
           </a:bodyPr>
           <a:lstStyle/>
@@ -5091,13 +4829,12 @@
             <a:pPr>
               <a:defRPr sz="1100" b="1">
                 <a:solidFill>
-                  <a:srgbClr val="1E3A8A"/>
-                </a:solidFill>
-                <a:latin typeface="Segoe UI"/>
-              </a:defRPr>
-            </a:pPr>
-            <a:r>
-              <a:t>04. LUỒNG VẬN HÀNH BƯU PHẨM</a:t>
+                  <a:srgbClr val="2563EB"/>
+                </a:solidFill>
+              </a:defRPr>
+            </a:pPr>
+            <a:r>
+              <a:t>MÀN HÌNH 04</a:t>
             </a:r>
           </a:p>
         </p:txBody>
@@ -5110,8 +4847,8 @@
         </p:nvSpPr>
         <p:spPr>
           <a:xfrm>
-            <a:off x="731520" y="777240"/>
-            <a:ext cx="10698480" cy="640080"/>
+            <a:off x="731520" y="594360"/>
+            <a:ext cx="10515600" cy="502920"/>
           </a:xfrm>
           <a:prstGeom prst="rect">
             <a:avLst/>
@@ -5119,35 +4856,69 @@
           <a:noFill/>
         </p:spPr>
         <p:txBody>
-          <a:bodyPr wrap="square" lIns="0" tIns="0" rIns="0" bIns="0">
+          <a:bodyPr wrap="square">
             <a:spAutoFit/>
           </a:bodyPr>
           <a:lstStyle/>
           <a:p>
             <a:pPr>
-              <a:defRPr sz="2400" b="1">
-                <a:solidFill>
-                  <a:srgbClr val="111827"/>
-                </a:solidFill>
-                <a:latin typeface="Segoe UI"/>
-              </a:defRPr>
-            </a:pPr>
-            <a:r>
-              <a:t>Quy Trình Đơn Hàng &amp; Tích Hợp GHN Logistics Tự Động</a:t>
-            </a:r>
-          </a:p>
-        </p:txBody>
-      </p:sp>
-      <p:sp>
-        <p:nvSpPr>
-          <p:cNvPr id="5" name="Rounded Rectangle 4"/>
+              <a:defRPr sz="2000" b="1">
+                <a:solidFill>
+                  <a:srgbClr val="0F172A"/>
+                </a:solidFill>
+              </a:defRPr>
+            </a:pPr>
+            <a:r>
+              <a:t>Trợ Lý AI Stylist &amp; Thẻ Combo Mua Sắm 1-Chạm</a:t>
+            </a:r>
+          </a:p>
+        </p:txBody>
+      </p:sp>
+      <p:sp>
+        <p:nvSpPr>
+          <p:cNvPr id="5" name="TextBox 4"/>
+          <p:cNvSpPr txBox="1"/>
+          <p:nvPr/>
+        </p:nvSpPr>
+        <p:spPr>
+          <a:xfrm>
+            <a:off x="731520" y="1097280"/>
+            <a:ext cx="10515600" cy="320040"/>
+          </a:xfrm>
+          <a:prstGeom prst="rect">
+            <a:avLst/>
+          </a:prstGeom>
+          <a:noFill/>
+        </p:spPr>
+        <p:txBody>
+          <a:bodyPr wrap="square">
+            <a:spAutoFit/>
+          </a:bodyPr>
+          <a:lstStyle/>
+          <a:p>
+            <a:pPr>
+              <a:defRPr sz="1150">
+                <a:solidFill>
+                  <a:srgbClr val="64748B"/>
+                </a:solidFill>
+              </a:defRPr>
+            </a:pPr>
+            <a:r>
+              <a:t>Phối đồ cá nhân hóa dựa trên số đo, lịch sử tìm kiếm và đơn hàng cũ</a:t>
+            </a:r>
+          </a:p>
+        </p:txBody>
+      </p:sp>
+      <p:sp>
+        <p:nvSpPr>
+          <p:cNvPr id="6" name="Rounded Rectangle 5"/>
           <p:cNvSpPr/>
           <p:nvPr/>
         </p:nvSpPr>
         <p:spPr>
           <a:xfrm>
-            <a:off x="731520" y="1645920"/>
-            <a:ext cx="2468880" cy="4480560"/>
+            <a:off x="731520" y="1554480"/>
+            <a:ext cx="4114800" cy="4846320"/>
           </a:xfrm>
           <a:prstGeom prst="roundRect">
             <a:avLst/>
@@ -5155,9 +4926,9 @@
           <a:solidFill>
             <a:srgbClr val="FFFFFF"/>
           </a:solidFill>
-          <a:ln w="12700">
+          <a:ln>
             <a:solidFill>
-              <a:srgbClr val="E2E4E9"/>
+              <a:srgbClr val="E2E8F0"/>
             </a:solidFill>
           </a:ln>
         </p:spPr>
@@ -5176,424 +4947,135 @@
           </a:fontRef>
         </p:style>
         <p:txBody>
-          <a:bodyPr rtlCol="0" anchor="ctr" wrap="square" lIns="228600" rIns="228600" tIns="228600"/>
-          <a:lstStyle/>
-          <a:p>
-            <a:pPr algn="ctr">
-              <a:defRPr sz="1100" b="1">
-                <a:solidFill>
-                  <a:srgbClr val="1E3A8A"/>
-                </a:solidFill>
-              </a:defRPr>
-            </a:pPr>
-            <a:r>
-              <a:t>BƯỚC 1 — KHÁCH HÀNG</a:t>
-            </a:r>
-          </a:p>
-          <a:p>
-            <a:pPr>
-              <a:defRPr sz="1700" b="1">
-                <a:solidFill>
-                  <a:srgbClr val="111827"/>
-                </a:solidFill>
-              </a:defRPr>
-            </a:pPr>
-            <a:r>
-              <a:t>Mua Sắm &amp; Đặt Hàng</a:t>
-            </a:r>
-          </a:p>
-          <a:p>
-            <a:pPr>
-              <a:defRPr sz="1300">
-                <a:solidFill>
-                  <a:srgbClr val="6B7280"/>
-                </a:solidFill>
-              </a:defRPr>
-            </a:pPr>
-            <a:r>
-              <a:t>• Duyệt sản phẩm N&amp;B.</a:t>
-            </a:r>
-          </a:p>
-          <a:p>
-            <a:pPr>
-              <a:defRPr sz="1300">
-                <a:solidFill>
-                  <a:srgbClr val="6B7280"/>
-                </a:solidFill>
-              </a:defRPr>
-            </a:pPr>
-            <a:r>
-              <a:t>• Nhận gợi ý size thông minh theo chiều cao/cân nặng.</a:t>
-            </a:r>
-          </a:p>
-          <a:p>
-            <a:pPr>
-              <a:defRPr sz="1300">
-                <a:solidFill>
-                  <a:srgbClr val="6B7280"/>
-                </a:solidFill>
-              </a:defRPr>
-            </a:pPr>
-            <a:r>
-              <a:t>• Thử đồ trong phòng thử 3D.</a:t>
-            </a:r>
-          </a:p>
-          <a:p>
-            <a:pPr>
-              <a:defRPr sz="1300">
-                <a:solidFill>
-                  <a:srgbClr val="6B7280"/>
-                </a:solidFill>
-              </a:defRPr>
-            </a:pPr>
-            <a:r>
-              <a:t>• Checkout COD hoặc quét VietQR thanh toán.</a:t>
-            </a:r>
-          </a:p>
-        </p:txBody>
-      </p:sp>
-      <p:sp>
-        <p:nvSpPr>
-          <p:cNvPr id="6" name="Rounded Rectangle 5"/>
-          <p:cNvSpPr/>
+          <a:bodyPr rtlCol="0" anchor="ctr"/>
+          <a:lstStyle/>
+          <a:p>
+            <a:pPr algn="ctr"/>
+          </a:p>
+        </p:txBody>
+      </p:sp>
+      <p:sp>
+        <p:nvSpPr>
+          <p:cNvPr id="7" name="TextBox 6"/>
+          <p:cNvSpPr txBox="1"/>
           <p:nvPr/>
         </p:nvSpPr>
         <p:spPr>
           <a:xfrm>
-            <a:off x="3474720" y="1645920"/>
-            <a:ext cx="2468880" cy="4480560"/>
-          </a:xfrm>
-          <a:prstGeom prst="roundRect">
-            <a:avLst/>
-          </a:prstGeom>
-          <a:solidFill>
-            <a:srgbClr val="FFFFFF"/>
-          </a:solidFill>
-          <a:ln w="12700">
-            <a:solidFill>
-              <a:srgbClr val="E2E4E9"/>
-            </a:solidFill>
-          </a:ln>
-        </p:spPr>
-        <p:style>
-          <a:lnRef idx="1">
-            <a:schemeClr val="accent1"/>
-          </a:lnRef>
-          <a:fillRef idx="3">
-            <a:schemeClr val="accent1"/>
-          </a:fillRef>
-          <a:effectRef idx="2">
-            <a:schemeClr val="accent1"/>
-          </a:effectRef>
-          <a:fontRef idx="minor">
-            <a:schemeClr val="lt1"/>
-          </a:fontRef>
-        </p:style>
-        <p:txBody>
-          <a:bodyPr rtlCol="0" anchor="ctr" wrap="square" lIns="228600" rIns="228600" tIns="228600"/>
-          <a:lstStyle/>
-          <a:p>
-            <a:pPr algn="ctr">
-              <a:defRPr sz="1100" b="1">
-                <a:solidFill>
-                  <a:srgbClr val="1E3A8A"/>
-                </a:solidFill>
-              </a:defRPr>
-            </a:pPr>
-            <a:r>
-              <a:t>BƯỚC 2 — HỆ THỐNG ADMIN</a:t>
-            </a:r>
-          </a:p>
-          <a:p>
-            <a:pPr>
-              <a:defRPr sz="1700" b="1">
-                <a:solidFill>
-                  <a:srgbClr val="111827"/>
-                </a:solidFill>
-              </a:defRPr>
-            </a:pPr>
-            <a:r>
-              <a:t>Xác Nhận &amp; Xử Lý</a:t>
-            </a:r>
-          </a:p>
-          <a:p>
-            <a:pPr>
-              <a:defRPr sz="1300">
-                <a:solidFill>
-                  <a:srgbClr val="6B7280"/>
-                </a:solidFill>
-              </a:defRPr>
-            </a:pPr>
-            <a:r>
-              <a:t>• Tiếp nhận đơn hàng tự động.</a:t>
-            </a:r>
-          </a:p>
-          <a:p>
-            <a:pPr>
-              <a:defRPr sz="1300">
-                <a:solidFill>
-                  <a:srgbClr val="6B7280"/>
-                </a:solidFill>
-              </a:defRPr>
-            </a:pPr>
-            <a:r>
-              <a:t>• Kiểm tra tồn kho kho hàng Flagship.</a:t>
-            </a:r>
-          </a:p>
-          <a:p>
-            <a:pPr>
-              <a:defRPr sz="1300">
-                <a:solidFill>
-                  <a:srgbClr val="6B7280"/>
-                </a:solidFill>
-              </a:defRPr>
-            </a:pPr>
-            <a:r>
-              <a:t>• Admin duyệt đơn sang trạng thái Đã xác nhận (Confirmed).</a:t>
-            </a:r>
-          </a:p>
-          <a:p>
-            <a:pPr>
-              <a:defRPr sz="1300">
-                <a:solidFill>
-                  <a:srgbClr val="6B7280"/>
-                </a:solidFill>
-              </a:defRPr>
-            </a:pPr>
-            <a:r>
-              <a:t>• Chuẩn bị đóng gói sản phẩm.</a:t>
-            </a:r>
-          </a:p>
-        </p:txBody>
-      </p:sp>
-      <p:sp>
-        <p:nvSpPr>
-          <p:cNvPr id="7" name="Rounded Rectangle 6"/>
-          <p:cNvSpPr/>
+            <a:off x="914400" y="1737360"/>
+            <a:ext cx="3749039" cy="4480560"/>
+          </a:xfrm>
+          <a:prstGeom prst="rect">
+            <a:avLst/>
+          </a:prstGeom>
+          <a:noFill/>
+        </p:spPr>
+        <p:txBody>
+          <a:bodyPr wrap="square">
+            <a:spAutoFit/>
+          </a:bodyPr>
+          <a:lstStyle/>
+          <a:p>
+            <a:pPr>
+              <a:spcAft>
+                <a:spcPts val="1200"/>
+              </a:spcAft>
+              <a:defRPr sz="1200" b="1">
+                <a:solidFill>
+                  <a:srgbClr val="2563EB"/>
+                </a:solidFill>
+              </a:defRPr>
+            </a:pPr>
+            <a:r>
+              <a:t>CÁC ĐIỂM NỔI BẬT</a:t>
+            </a:r>
+          </a:p>
+          <a:p>
+            <a:pPr>
+              <a:spcAft>
+                <a:spcPts val="800"/>
+              </a:spcAft>
+              <a:defRPr sz="1050">
+                <a:solidFill>
+                  <a:srgbClr val="1E293B"/>
+                </a:solidFill>
+              </a:defRPr>
+            </a:pPr>
+            <a:r>
+              <a:t>✔ Chatbox AI Stylist kết nối mô hình Google Gemini LLM phản hồi nhanh.</a:t>
+            </a:r>
+          </a:p>
+          <a:p>
+            <a:pPr>
+              <a:spcAft>
+                <a:spcPts val="800"/>
+              </a:spcAft>
+              <a:defRPr sz="1050">
+                <a:solidFill>
+                  <a:srgbClr val="1E293B"/>
+                </a:solidFill>
+              </a:defRPr>
+            </a:pPr>
+            <a:r>
+              <a:t>✔ Cá nhân hóa theo số đo Chiều cao/Cân nặng để tư vấn size chuẩn xác.</a:t>
+            </a:r>
+          </a:p>
+          <a:p>
+            <a:pPr>
+              <a:spcAft>
+                <a:spcPts val="800"/>
+              </a:spcAft>
+              <a:defRPr sz="1050">
+                <a:solidFill>
+                  <a:srgbClr val="1E293B"/>
+                </a:solidFill>
+              </a:defRPr>
+            </a:pPr>
+            <a:r>
+              <a:t>✔ Đọc lịch sử tìm kiếm &amp; đơn cũ để gợi ý phối chéo với tủ đồ có sẵn.</a:t>
+            </a:r>
+          </a:p>
+          <a:p>
+            <a:pPr>
+              <a:spcAft>
+                <a:spcPts val="800"/>
+              </a:spcAft>
+              <a:defRPr sz="1050">
+                <a:solidFill>
+                  <a:srgbClr val="1E293B"/>
+                </a:solidFill>
+              </a:defRPr>
+            </a:pPr>
+            <a:r>
+              <a:t>✔ Thẻ Combo Mua Sắm: Tự động ghép 1 Áo + 1 Quần có ảnh thật, giá tiền, nút 'Thêm giỏ' và 'Mua ngay' 1-chạm.</a:t>
+            </a:r>
+          </a:p>
+        </p:txBody>
+      </p:sp>
+      <p:pic>
+        <p:nvPicPr>
+          <p:cNvPr id="8" name="Picture 7" descr="shot_05_stylist.png"/>
+          <p:cNvPicPr>
+            <a:picLocks noChangeAspect="1"/>
+          </p:cNvPicPr>
           <p:nvPr/>
-        </p:nvSpPr>
-        <p:spPr>
-          <a:xfrm>
-            <a:off x="6217920" y="1645920"/>
-            <a:ext cx="2468880" cy="4480560"/>
-          </a:xfrm>
-          <a:prstGeom prst="roundRect">
-            <a:avLst/>
-          </a:prstGeom>
-          <a:solidFill>
-            <a:srgbClr val="FFFFFF"/>
-          </a:solidFill>
-          <a:ln w="25400">
-            <a:solidFill>
-              <a:srgbClr val="C2985B"/>
-            </a:solidFill>
-          </a:ln>
-        </p:spPr>
-        <p:style>
-          <a:lnRef idx="1">
-            <a:schemeClr val="accent1"/>
-          </a:lnRef>
-          <a:fillRef idx="3">
-            <a:schemeClr val="accent1"/>
-          </a:fillRef>
-          <a:effectRef idx="2">
-            <a:schemeClr val="accent1"/>
-          </a:effectRef>
-          <a:fontRef idx="minor">
-            <a:schemeClr val="lt1"/>
-          </a:fontRef>
-        </p:style>
-        <p:txBody>
-          <a:bodyPr rtlCol="0" anchor="ctr" wrap="square" lIns="228600" rIns="228600" tIns="228600"/>
-          <a:lstStyle/>
-          <a:p>
-            <a:pPr algn="ctr">
-              <a:defRPr sz="1100" b="1">
-                <a:solidFill>
-                  <a:srgbClr val="C2985B"/>
-                </a:solidFill>
-              </a:defRPr>
-            </a:pPr>
-            <a:r>
-              <a:t>BƯỚC 3 — API GHN BƯU CỤC</a:t>
-            </a:r>
-          </a:p>
-          <a:p>
-            <a:pPr>
-              <a:defRPr sz="1700" b="1">
-                <a:solidFill>
-                  <a:srgbClr val="111827"/>
-                </a:solidFill>
-              </a:defRPr>
-            </a:pPr>
-            <a:r>
-              <a:t>Tạo Vận Đơn GHN</a:t>
-            </a:r>
-          </a:p>
-          <a:p>
-            <a:pPr>
-              <a:defRPr sz="1300">
-                <a:solidFill>
-                  <a:srgbClr val="6B7280"/>
-                </a:solidFill>
-              </a:defRPr>
-            </a:pPr>
-            <a:r>
-              <a:t>• Bấm nút 'Tạo vận đơn GHN'.</a:t>
-            </a:r>
-          </a:p>
-          <a:p>
-            <a:pPr>
-              <a:defRPr sz="1300">
-                <a:solidFill>
-                  <a:srgbClr val="6B7280"/>
-                </a:solidFill>
-              </a:defRPr>
-            </a:pPr>
-            <a:r>
-              <a:t>• Hệ thống gửi request sang GHN Dev Gateway.</a:t>
-            </a:r>
-          </a:p>
-          <a:p>
-            <a:pPr>
-              <a:defRPr sz="1300">
-                <a:solidFill>
-                  <a:srgbClr val="6B7280"/>
-                </a:solidFill>
-              </a:defRPr>
-            </a:pPr>
-            <a:r>
-              <a:t>• GHN sinh mã vận đơn chính thức (VD: LYQGW4).</a:t>
-            </a:r>
-          </a:p>
-          <a:p>
-            <a:pPr>
-              <a:defRPr sz="1300">
-                <a:solidFill>
-                  <a:srgbClr val="6B7280"/>
-                </a:solidFill>
-              </a:defRPr>
-            </a:pPr>
-            <a:r>
-              <a:t>• Đơn nhảy lên bảng điều khiển 5sao.ghn.dev bưu tá.</a:t>
-            </a:r>
-          </a:p>
-        </p:txBody>
-      </p:sp>
-      <p:sp>
-        <p:nvSpPr>
-          <p:cNvPr id="8" name="Rounded Rectangle 7"/>
-          <p:cNvSpPr/>
-          <p:nvPr/>
-        </p:nvSpPr>
-        <p:spPr>
-          <a:xfrm>
-            <a:off x="8961120" y="1645920"/>
-            <a:ext cx="2468880" cy="4480560"/>
-          </a:xfrm>
-          <a:prstGeom prst="roundRect">
-            <a:avLst/>
-          </a:prstGeom>
-          <a:solidFill>
-            <a:srgbClr val="FFFFFF"/>
-          </a:solidFill>
-          <a:ln w="12700">
-            <a:solidFill>
-              <a:srgbClr val="E2E4E9"/>
-            </a:solidFill>
-          </a:ln>
-        </p:spPr>
-        <p:style>
-          <a:lnRef idx="1">
-            <a:schemeClr val="accent1"/>
-          </a:lnRef>
-          <a:fillRef idx="3">
-            <a:schemeClr val="accent1"/>
-          </a:fillRef>
-          <a:effectRef idx="2">
-            <a:schemeClr val="accent1"/>
-          </a:effectRef>
-          <a:fontRef idx="minor">
-            <a:schemeClr val="lt1"/>
-          </a:fontRef>
-        </p:style>
-        <p:txBody>
-          <a:bodyPr rtlCol="0" anchor="ctr" wrap="square" lIns="228600" rIns="228600" tIns="228600"/>
-          <a:lstStyle/>
-          <a:p>
-            <a:pPr algn="ctr">
-              <a:defRPr sz="1100" b="1">
-                <a:solidFill>
-                  <a:srgbClr val="1E3A8A"/>
-                </a:solidFill>
-              </a:defRPr>
-            </a:pPr>
-            <a:r>
-              <a:t>BƯỚC 4 — ĐÓNG GÓI &amp; BÀN GIAO</a:t>
-            </a:r>
-          </a:p>
-          <a:p>
-            <a:pPr>
-              <a:defRPr sz="1700" b="1">
-                <a:solidFill>
-                  <a:srgbClr val="111827"/>
-                </a:solidFill>
-              </a:defRPr>
-            </a:pPr>
-            <a:r>
-              <a:t>In Phiếu &amp; Phát Hàng</a:t>
-            </a:r>
-          </a:p>
-          <a:p>
-            <a:pPr>
-              <a:defRPr sz="1300">
-                <a:solidFill>
-                  <a:srgbClr val="6B7280"/>
-                </a:solidFill>
-              </a:defRPr>
-            </a:pPr>
-            <a:r>
-              <a:t>• Bấm 'In phiếu giao hàng / Xuất PDF'.</a:t>
-            </a:r>
-          </a:p>
-          <a:p>
-            <a:pPr>
-              <a:defRPr sz="1300">
-                <a:solidFill>
-                  <a:srgbClr val="6B7280"/>
-                </a:solidFill>
-              </a:defRPr>
-            </a:pPr>
-            <a:r>
-              <a:t>• Phiếu in chuẩn A4/A5 dán hộp có mã vạch và số tiền COD.</a:t>
-            </a:r>
-          </a:p>
-          <a:p>
-            <a:pPr>
-              <a:defRPr sz="1300">
-                <a:solidFill>
-                  <a:srgbClr val="6B7280"/>
-                </a:solidFill>
-              </a:defRPr>
-            </a:pPr>
-            <a:r>
-              <a:t>• Bưu tá GHN lấy hàng đi giao.</a:t>
-            </a:r>
-          </a:p>
-          <a:p>
-            <a:pPr>
-              <a:defRPr sz="1300">
-                <a:solidFill>
-                  <a:srgbClr val="6B7280"/>
-                </a:solidFill>
-              </a:defRPr>
-            </a:pPr>
-            <a:r>
-              <a:t>• Khách tra cứu hành trình trực tiếp.</a:t>
-            </a:r>
-          </a:p>
-        </p:txBody>
-      </p:sp>
+        </p:nvPicPr>
+        <p:blipFill>
+          <a:blip r:embed="rId2"/>
+          <a:stretch>
+            <a:fillRect/>
+          </a:stretch>
+        </p:blipFill>
+        <p:spPr>
+          <a:xfrm>
+            <a:off x="5029200" y="1554480"/>
+            <a:ext cx="6400800" cy="4846320"/>
+          </a:xfrm>
+          <a:prstGeom prst="rect">
+            <a:avLst/>
+          </a:prstGeom>
+        </p:spPr>
+      </p:pic>
     </p:spTree>
   </p:cSld>
   <p:clrMapOvr>
@@ -5621,13 +5103,13 @@
         <p:spPr>
           <a:xfrm>
             <a:off x="0" y="0"/>
-            <a:ext cx="12191695" cy="6858000"/>
+            <a:ext cx="12188952" cy="6858000"/>
           </a:xfrm>
           <a:prstGeom prst="rect">
             <a:avLst/>
           </a:prstGeom>
           <a:solidFill>
-            <a:srgbClr val="181A20"/>
+            <a:srgbClr val="F8FAFC"/>
           </a:solidFill>
           <a:ln>
             <a:noFill/>
@@ -5663,8 +5145,8 @@
         </p:nvSpPr>
         <p:spPr>
           <a:xfrm>
-            <a:off x="731520" y="457200"/>
-            <a:ext cx="10698480" cy="365760"/>
+            <a:off x="731520" y="320040"/>
+            <a:ext cx="7315200" cy="320040"/>
           </a:xfrm>
           <a:prstGeom prst="rect">
             <a:avLst/>
@@ -5672,7 +5154,7 @@
           <a:noFill/>
         </p:spPr>
         <p:txBody>
-          <a:bodyPr wrap="square" lIns="0" tIns="0" rIns="0" bIns="0">
+          <a:bodyPr wrap="square">
             <a:spAutoFit/>
           </a:bodyPr>
           <a:lstStyle/>
@@ -5680,13 +5162,12 @@
             <a:pPr>
               <a:defRPr sz="1100" b="1">
                 <a:solidFill>
-                  <a:srgbClr val="C2985B"/>
-                </a:solidFill>
-                <a:latin typeface="Segoe UI"/>
-              </a:defRPr>
-            </a:pPr>
-            <a:r>
-              <a:t>05. TRÌNH DIỄN THỰC TẾ</a:t>
+                  <a:srgbClr val="2563EB"/>
+                </a:solidFill>
+              </a:defRPr>
+            </a:pPr>
+            <a:r>
+              <a:t>MÀN HÌNH 05</a:t>
             </a:r>
           </a:p>
         </p:txBody>
@@ -5699,8 +5180,8 @@
         </p:nvSpPr>
         <p:spPr>
           <a:xfrm>
-            <a:off x="731520" y="777240"/>
-            <a:ext cx="10698480" cy="640080"/>
+            <a:off x="731520" y="594360"/>
+            <a:ext cx="10515600" cy="502920"/>
           </a:xfrm>
           <a:prstGeom prst="rect">
             <a:avLst/>
@@ -5708,45 +5189,79 @@
           <a:noFill/>
         </p:spPr>
         <p:txBody>
-          <a:bodyPr wrap="square" lIns="0" tIns="0" rIns="0" bIns="0">
+          <a:bodyPr wrap="square">
             <a:spAutoFit/>
           </a:bodyPr>
           <a:lstStyle/>
           <a:p>
             <a:pPr>
-              <a:defRPr sz="2400" b="1">
-                <a:solidFill>
-                  <a:srgbClr val="FFFFFF"/>
-                </a:solidFill>
-                <a:latin typeface="Segoe UI"/>
-              </a:defRPr>
-            </a:pPr>
-            <a:r>
-              <a:t>Kịch Bản Live Demo Sản Phẩm Trên Trình Duyệt</a:t>
-            </a:r>
-          </a:p>
-        </p:txBody>
-      </p:sp>
-      <p:sp>
-        <p:nvSpPr>
-          <p:cNvPr id="5" name="Rounded Rectangle 4"/>
+              <a:defRPr sz="2000" b="1">
+                <a:solidFill>
+                  <a:srgbClr val="0F172A"/>
+                </a:solidFill>
+              </a:defRPr>
+            </a:pPr>
+            <a:r>
+              <a:t>Phòng Thử Đồ 3D (Virtual Try-On WebGL)</a:t>
+            </a:r>
+          </a:p>
+        </p:txBody>
+      </p:sp>
+      <p:sp>
+        <p:nvSpPr>
+          <p:cNvPr id="5" name="TextBox 4"/>
+          <p:cNvSpPr txBox="1"/>
+          <p:nvPr/>
+        </p:nvSpPr>
+        <p:spPr>
+          <a:xfrm>
+            <a:off x="731520" y="1097280"/>
+            <a:ext cx="10515600" cy="320040"/>
+          </a:xfrm>
+          <a:prstGeom prst="rect">
+            <a:avLst/>
+          </a:prstGeom>
+          <a:noFill/>
+        </p:spPr>
+        <p:txBody>
+          <a:bodyPr wrap="square">
+            <a:spAutoFit/>
+          </a:bodyPr>
+          <a:lstStyle/>
+          <a:p>
+            <a:pPr>
+              <a:defRPr sz="1150">
+                <a:solidFill>
+                  <a:srgbClr val="64748B"/>
+                </a:solidFill>
+              </a:defRPr>
+            </a:pPr>
+            <a:r>
+              <a:t>Ướm trang phục trực quan trên trình duyệt Web không cần cài cắm app</a:t>
+            </a:r>
+          </a:p>
+        </p:txBody>
+      </p:sp>
+      <p:sp>
+        <p:nvSpPr>
+          <p:cNvPr id="6" name="Rounded Rectangle 5"/>
           <p:cNvSpPr/>
           <p:nvPr/>
         </p:nvSpPr>
         <p:spPr>
           <a:xfrm>
-            <a:off x="731520" y="1645920"/>
-            <a:ext cx="3383280" cy="4480560"/>
+            <a:off x="731520" y="1554480"/>
+            <a:ext cx="4114800" cy="4846320"/>
           </a:xfrm>
           <a:prstGeom prst="roundRect">
             <a:avLst/>
           </a:prstGeom>
           <a:solidFill>
-            <a:srgbClr val="232733"/>
+            <a:srgbClr val="FFFFFF"/>
           </a:solidFill>
           <a:ln>
             <a:solidFill>
-              <a:srgbClr val="374151"/>
+              <a:srgbClr val="E2E8F0"/>
             </a:solidFill>
           </a:ln>
         </p:spPr>
@@ -5765,310 +5280,135 @@
           </a:fontRef>
         </p:style>
         <p:txBody>
-          <a:bodyPr rtlCol="0" anchor="ctr" wrap="square" lIns="274320" rIns="274320" tIns="274320"/>
-          <a:lstStyle/>
-          <a:p>
-            <a:pPr algn="ctr">
-              <a:defRPr sz="1300" b="1">
-                <a:solidFill>
-                  <a:srgbClr val="C2985B"/>
-                </a:solidFill>
-              </a:defRPr>
-            </a:pPr>
-            <a:r>
-              <a:t>KỊCH BẢN 1: KHÁCH HÀNG &amp; AI STYLIST</a:t>
-            </a:r>
-          </a:p>
-          <a:p>
-            <a:pPr>
-              <a:defRPr sz="1300">
-                <a:solidFill>
-                  <a:srgbClr val="D1D5DB"/>
-                </a:solidFill>
-              </a:defRPr>
-            </a:pPr>
-            <a:r>
-              <a:t>1. Mở Chatbox AI Stylist -&gt; Nhận tư vấn cá nhân hóa theo số đo, lịch sử tìm kiếm &amp; đơn hàng cũ.</a:t>
-            </a:r>
-          </a:p>
-          <a:p>
-            <a:pPr>
-              <a:defRPr sz="1300">
-                <a:solidFill>
-                  <a:srgbClr val="D1D5DB"/>
-                </a:solidFill>
-              </a:defRPr>
-            </a:pPr>
-            <a:r>
-              <a:t>2. Nhận Thẻ Combo Mua Sắm trực quan -&gt; Bấm 'Thêm vào giỏ' hoặc 'Mua ngay' 1-chạm.</a:t>
-            </a:r>
-          </a:p>
-          <a:p>
-            <a:pPr>
-              <a:defRPr sz="1300">
-                <a:solidFill>
-                  <a:srgbClr val="D1D5DB"/>
-                </a:solidFill>
-              </a:defRPr>
-            </a:pPr>
-            <a:r>
-              <a:t>3. Truy cập Phòng thử đồ 3D -&gt; Trải nghiệm xoay 360 độ, kiểm tra độ rủ vải và thẻ Fit Card.</a:t>
-            </a:r>
-          </a:p>
-          <a:p>
-            <a:pPr>
-              <a:defRPr sz="1300">
-                <a:solidFill>
-                  <a:srgbClr val="D1D5DB"/>
-                </a:solidFill>
-              </a:defRPr>
-            </a:pPr>
-            <a:r>
-              <a:t>4. Đặt hàng qua COD hoặc quét mã VietQR tự động với sổ địa chỉ nhận hàng.</a:t>
-            </a:r>
-          </a:p>
-          <a:p>
-            <a:pPr>
-              <a:defRPr sz="1300">
-                <a:solidFill>
-                  <a:srgbClr val="D1D5DB"/>
-                </a:solidFill>
-              </a:defRPr>
-            </a:pPr>
-            <a:r>
-              <a:t>5. Quy trình khép kín: Tư vấn AI -&gt; Thử đồ 3D -&gt; Mua hàng chỉ trong vài thao tác.</a:t>
-            </a:r>
-          </a:p>
-        </p:txBody>
-      </p:sp>
-      <p:sp>
-        <p:nvSpPr>
-          <p:cNvPr id="6" name="Rounded Rectangle 5"/>
-          <p:cNvSpPr/>
+          <a:bodyPr rtlCol="0" anchor="ctr"/>
+          <a:lstStyle/>
+          <a:p>
+            <a:pPr algn="ctr"/>
+          </a:p>
+        </p:txBody>
+      </p:sp>
+      <p:sp>
+        <p:nvSpPr>
+          <p:cNvPr id="7" name="TextBox 6"/>
+          <p:cNvSpPr txBox="1"/>
           <p:nvPr/>
         </p:nvSpPr>
         <p:spPr>
           <a:xfrm>
-            <a:off x="4389120" y="1645920"/>
-            <a:ext cx="3383280" cy="4480560"/>
-          </a:xfrm>
-          <a:prstGeom prst="roundRect">
-            <a:avLst/>
-          </a:prstGeom>
-          <a:solidFill>
-            <a:srgbClr val="232733"/>
-          </a:solidFill>
-          <a:ln>
-            <a:solidFill>
-              <a:srgbClr val="374151"/>
-            </a:solidFill>
-          </a:ln>
-        </p:spPr>
-        <p:style>
-          <a:lnRef idx="1">
-            <a:schemeClr val="accent1"/>
-          </a:lnRef>
-          <a:fillRef idx="3">
-            <a:schemeClr val="accent1"/>
-          </a:fillRef>
-          <a:effectRef idx="2">
-            <a:schemeClr val="accent1"/>
-          </a:effectRef>
-          <a:fontRef idx="minor">
-            <a:schemeClr val="lt1"/>
-          </a:fontRef>
-        </p:style>
-        <p:txBody>
-          <a:bodyPr rtlCol="0" anchor="ctr" wrap="square" lIns="274320" rIns="274320" tIns="274320"/>
-          <a:lstStyle/>
-          <a:p>
-            <a:pPr algn="ctr">
-              <a:defRPr sz="1300" b="1">
+            <a:off x="914400" y="1737360"/>
+            <a:ext cx="3749039" cy="4480560"/>
+          </a:xfrm>
+          <a:prstGeom prst="rect">
+            <a:avLst/>
+          </a:prstGeom>
+          <a:noFill/>
+        </p:spPr>
+        <p:txBody>
+          <a:bodyPr wrap="square">
+            <a:spAutoFit/>
+          </a:bodyPr>
+          <a:lstStyle/>
+          <a:p>
+            <a:pPr>
+              <a:spcAft>
+                <a:spcPts val="1200"/>
+              </a:spcAft>
+              <a:defRPr sz="1200" b="1">
                 <a:solidFill>
                   <a:srgbClr val="2563EB"/>
                 </a:solidFill>
               </a:defRPr>
             </a:pPr>
             <a:r>
-              <a:t>KỊCH BẢN 2: QUẢN TRỊ ADMIN</a:t>
-            </a:r>
-          </a:p>
-          <a:p>
-            <a:pPr>
-              <a:defRPr sz="1300">
-                <a:solidFill>
-                  <a:srgbClr val="D1D5DB"/>
-                </a:solidFill>
-              </a:defRPr>
-            </a:pPr>
-            <a:r>
-              <a:t>1. Đăng nhập quyền Admin truy cập /admin/orders.</a:t>
-            </a:r>
-          </a:p>
-          <a:p>
-            <a:pPr>
-              <a:defRPr sz="1300">
-                <a:solidFill>
-                  <a:srgbClr val="D1D5DB"/>
-                </a:solidFill>
-              </a:defRPr>
-            </a:pPr>
-            <a:r>
-              <a:t>2. Kiểm tra danh sách đơn hàng vừa đặt.</a:t>
-            </a:r>
-          </a:p>
-          <a:p>
-            <a:pPr>
-              <a:defRPr sz="1300">
-                <a:solidFill>
-                  <a:srgbClr val="D1D5DB"/>
-                </a:solidFill>
-              </a:defRPr>
-            </a:pPr>
-            <a:r>
-              <a:t>3. Bấm xác nhận đơn và tiến hành 'Tạo vận đơn GHN'.</a:t>
-            </a:r>
-          </a:p>
-          <a:p>
-            <a:pPr>
-              <a:defRPr sz="1300">
-                <a:solidFill>
-                  <a:srgbClr val="D1D5DB"/>
-                </a:solidFill>
-              </a:defRPr>
-            </a:pPr>
-            <a:r>
-              <a:t>4. Quan sát hệ thống gọi API và cập nhật mã vận đơn bưu cục thật.</a:t>
-            </a:r>
-          </a:p>
-          <a:p>
-            <a:pPr>
-              <a:defRPr sz="1300">
-                <a:solidFill>
-                  <a:srgbClr val="D1D5DB"/>
-                </a:solidFill>
-              </a:defRPr>
-            </a:pPr>
-            <a:r>
-              <a:t>5. Mở tab bưu cục https://5sao.ghn.dev kiểm tra đơn đã xuất hiện.</a:t>
-            </a:r>
-          </a:p>
-        </p:txBody>
-      </p:sp>
-      <p:sp>
-        <p:nvSpPr>
-          <p:cNvPr id="7" name="Rounded Rectangle 6"/>
-          <p:cNvSpPr/>
+              <a:t>CÁC ĐIỂM NỔI BẬT</a:t>
+            </a:r>
+          </a:p>
+          <a:p>
+            <a:pPr>
+              <a:spcAft>
+                <a:spcPts val="800"/>
+              </a:spcAft>
+              <a:defRPr sz="1050">
+                <a:solidFill>
+                  <a:srgbClr val="1E293B"/>
+                </a:solidFill>
+              </a:defRPr>
+            </a:pPr>
+            <a:r>
+              <a:t>✔ Avatar 3D tự động co giãn theo số đo Chiều cao &amp; Cân nặng người dùng.</a:t>
+            </a:r>
+          </a:p>
+          <a:p>
+            <a:pPr>
+              <a:spcAft>
+                <a:spcPts val="800"/>
+              </a:spcAft>
+              <a:defRPr sz="1050">
+                <a:solidFill>
+                  <a:srgbClr val="1E293B"/>
+                </a:solidFill>
+              </a:defRPr>
+            </a:pPr>
+            <a:r>
+              <a:t>✔ Chạy mượt mà trên nền tảng Three.js / WebGL, xoay 360 độ linh hoạt.</a:t>
+            </a:r>
+          </a:p>
+          <a:p>
+            <a:pPr>
+              <a:spcAft>
+                <a:spcPts val="800"/>
+              </a:spcAft>
+              <a:defRPr sz="1050">
+                <a:solidFill>
+                  <a:srgbClr val="1E293B"/>
+                </a:solidFill>
+              </a:defRPr>
+            </a:pPr>
+            <a:r>
+              <a:t>✔ Thử các mẫu trang phục: Sơ mi Oxford, Áo thun Graphic, Quần tây đen, Váy.</a:t>
+            </a:r>
+          </a:p>
+          <a:p>
+            <a:pPr>
+              <a:spcAft>
+                <a:spcPts val="800"/>
+              </a:spcAft>
+              <a:defRPr sz="1050">
+                <a:solidFill>
+                  <a:srgbClr val="1E293B"/>
+                </a:solidFill>
+              </a:defRPr>
+            </a:pPr>
+            <a:r>
+              <a:t>✔ Đổi màu sắc trang phục linh hoạt theo các phiên bản màu sẵn có trong kho.</a:t>
+            </a:r>
+          </a:p>
+        </p:txBody>
+      </p:sp>
+      <p:pic>
+        <p:nvPicPr>
+          <p:cNvPr id="8" name="Picture 7" descr="shot_04_tryon.png"/>
+          <p:cNvPicPr>
+            <a:picLocks noChangeAspect="1"/>
+          </p:cNvPicPr>
           <p:nvPr/>
-        </p:nvSpPr>
-        <p:spPr>
-          <a:xfrm>
-            <a:off x="8046720" y="1645920"/>
-            <a:ext cx="3383280" cy="4480560"/>
-          </a:xfrm>
-          <a:prstGeom prst="roundRect">
-            <a:avLst/>
-          </a:prstGeom>
-          <a:solidFill>
-            <a:srgbClr val="232733"/>
-          </a:solidFill>
-          <a:ln>
-            <a:solidFill>
-              <a:srgbClr val="374151"/>
-            </a:solidFill>
-          </a:ln>
-        </p:spPr>
-        <p:style>
-          <a:lnRef idx="1">
-            <a:schemeClr val="accent1"/>
-          </a:lnRef>
-          <a:fillRef idx="3">
-            <a:schemeClr val="accent1"/>
-          </a:fillRef>
-          <a:effectRef idx="2">
-            <a:schemeClr val="accent1"/>
-          </a:effectRef>
-          <a:fontRef idx="minor">
-            <a:schemeClr val="lt1"/>
-          </a:fontRef>
-        </p:style>
-        <p:txBody>
-          <a:bodyPr rtlCol="0" anchor="ctr" wrap="square" lIns="274320" rIns="274320" tIns="274320"/>
-          <a:lstStyle/>
-          <a:p>
-            <a:pPr algn="ctr">
-              <a:defRPr sz="1300" b="1">
-                <a:solidFill>
-                  <a:srgbClr val="059669"/>
-                </a:solidFill>
-              </a:defRPr>
-            </a:pPr>
-            <a:r>
-              <a:t>KỊCH BẢN 3: ĐÓNG GÓI &amp; TRA CỨU</a:t>
-            </a:r>
-          </a:p>
-          <a:p>
-            <a:pPr>
-              <a:defRPr sz="1300">
-                <a:solidFill>
-                  <a:srgbClr val="D1D5DB"/>
-                </a:solidFill>
-              </a:defRPr>
-            </a:pPr>
-            <a:r>
-              <a:t>1. Bấm 'In phiếu giao hàng' ngay trên bảng đơn hàng.</a:t>
-            </a:r>
-          </a:p>
-          <a:p>
-            <a:pPr>
-              <a:defRPr sz="1300">
-                <a:solidFill>
-                  <a:srgbClr val="D1D5DB"/>
-                </a:solidFill>
-              </a:defRPr>
-            </a:pPr>
-            <a:r>
-              <a:t>2. Hiển thị phiếu in A4/A5 có Barcode, thông tin người gửi/nhận và số tiền COD.</a:t>
-            </a:r>
-          </a:p>
-          <a:p>
-            <a:pPr>
-              <a:defRPr sz="1300">
-                <a:solidFill>
-                  <a:srgbClr val="D1D5DB"/>
-                </a:solidFill>
-              </a:defRPr>
-            </a:pPr>
-            <a:r>
-              <a:t>3. Bấm 'In phiếu / Xuất PDF' xem giao diện bản in thực tế.</a:t>
-            </a:r>
-          </a:p>
-          <a:p>
-            <a:pPr>
-              <a:defRPr sz="1300">
-                <a:solidFill>
-                  <a:srgbClr val="D1D5DB"/>
-                </a:solidFill>
-              </a:defRPr>
-            </a:pPr>
-            <a:r>
-              <a:t>4. Đóng vai khách hàng: Bấm vào mã vận đơn để tra cứu lộ trình trực tiếp.</a:t>
-            </a:r>
-          </a:p>
-          <a:p>
-            <a:pPr>
-              <a:defRPr sz="1300">
-                <a:solidFill>
-                  <a:srgbClr val="D1D5DB"/>
-                </a:solidFill>
-              </a:defRPr>
-            </a:pPr>
-            <a:r>
-              <a:t>5. Xác nhận quy trình khép kín 100% từ mua sắm đến giao vận.</a:t>
-            </a:r>
-          </a:p>
-        </p:txBody>
-      </p:sp>
+        </p:nvPicPr>
+        <p:blipFill>
+          <a:blip r:embed="rId2"/>
+          <a:stretch>
+            <a:fillRect/>
+          </a:stretch>
+        </p:blipFill>
+        <p:spPr>
+          <a:xfrm>
+            <a:off x="5029200" y="1554480"/>
+            <a:ext cx="6400800" cy="4846320"/>
+          </a:xfrm>
+          <a:prstGeom prst="rect">
+            <a:avLst/>
+          </a:prstGeom>
+        </p:spPr>
+      </p:pic>
     </p:spTree>
   </p:cSld>
   <p:clrMapOvr>
@@ -6096,13 +5436,13 @@
         <p:spPr>
           <a:xfrm>
             <a:off x="0" y="0"/>
-            <a:ext cx="12191695" cy="6858000"/>
+            <a:ext cx="12188952" cy="6858000"/>
           </a:xfrm>
           <a:prstGeom prst="rect">
             <a:avLst/>
           </a:prstGeom>
           <a:solidFill>
-            <a:srgbClr val="F9F9FA"/>
+            <a:srgbClr val="F8FAFC"/>
           </a:solidFill>
           <a:ln>
             <a:noFill/>
@@ -6138,8 +5478,8 @@
         </p:nvSpPr>
         <p:spPr>
           <a:xfrm>
-            <a:off x="731520" y="457200"/>
-            <a:ext cx="10698480" cy="365760"/>
+            <a:off x="731520" y="320040"/>
+            <a:ext cx="7315200" cy="320040"/>
           </a:xfrm>
           <a:prstGeom prst="rect">
             <a:avLst/>
@@ -6147,7 +5487,7 @@
           <a:noFill/>
         </p:spPr>
         <p:txBody>
-          <a:bodyPr wrap="square" lIns="0" tIns="0" rIns="0" bIns="0">
+          <a:bodyPr wrap="square">
             <a:spAutoFit/>
           </a:bodyPr>
           <a:lstStyle/>
@@ -6155,13 +5495,12 @@
             <a:pPr>
               <a:defRPr sz="1100" b="1">
                 <a:solidFill>
-                  <a:srgbClr val="1E3A8A"/>
-                </a:solidFill>
-                <a:latin typeface="Segoe UI"/>
-              </a:defRPr>
-            </a:pPr>
-            <a:r>
-              <a:t>06. ĐÁNH GIÁ &amp; KẾ HOẠCH</a:t>
+                  <a:srgbClr val="2563EB"/>
+                </a:solidFill>
+              </a:defRPr>
+            </a:pPr>
+            <a:r>
+              <a:t>MÀN HÌNH 06</a:t>
             </a:r>
           </a:p>
         </p:txBody>
@@ -6174,8 +5513,8 @@
         </p:nvSpPr>
         <p:spPr>
           <a:xfrm>
-            <a:off x="731520" y="777240"/>
-            <a:ext cx="10698480" cy="640080"/>
+            <a:off x="731520" y="594360"/>
+            <a:ext cx="10515600" cy="502920"/>
           </a:xfrm>
           <a:prstGeom prst="rect">
             <a:avLst/>
@@ -6183,35 +5522,69 @@
           <a:noFill/>
         </p:spPr>
         <p:txBody>
-          <a:bodyPr wrap="square" lIns="0" tIns="0" rIns="0" bIns="0">
+          <a:bodyPr wrap="square">
             <a:spAutoFit/>
           </a:bodyPr>
           <a:lstStyle/>
           <a:p>
             <a:pPr>
-              <a:defRPr sz="2400" b="1">
-                <a:solidFill>
-                  <a:srgbClr val="111827"/>
-                </a:solidFill>
-                <a:latin typeface="Segoe UI"/>
-              </a:defRPr>
-            </a:pPr>
-            <a:r>
-              <a:t>Kết Quả Đạt Được &amp; Lộ Trình Hoàn Thiện Đến 12/2026</a:t>
-            </a:r>
-          </a:p>
-        </p:txBody>
-      </p:sp>
-      <p:sp>
-        <p:nvSpPr>
-          <p:cNvPr id="5" name="Rounded Rectangle 4"/>
+              <a:defRPr sz="2000" b="1">
+                <a:solidFill>
+                  <a:srgbClr val="0F172A"/>
+                </a:solidFill>
+              </a:defRPr>
+            </a:pPr>
+            <a:r>
+              <a:t>Dashboard Quản Trị Đơn Hàng Admin</a:t>
+            </a:r>
+          </a:p>
+        </p:txBody>
+      </p:sp>
+      <p:sp>
+        <p:nvSpPr>
+          <p:cNvPr id="5" name="TextBox 4"/>
+          <p:cNvSpPr txBox="1"/>
+          <p:nvPr/>
+        </p:nvSpPr>
+        <p:spPr>
+          <a:xfrm>
+            <a:off x="731520" y="1097280"/>
+            <a:ext cx="10515600" cy="320040"/>
+          </a:xfrm>
+          <a:prstGeom prst="rect">
+            <a:avLst/>
+          </a:prstGeom>
+          <a:noFill/>
+        </p:spPr>
+        <p:txBody>
+          <a:bodyPr wrap="square">
+            <a:spAutoFit/>
+          </a:bodyPr>
+          <a:lstStyle/>
+          <a:p>
+            <a:pPr>
+              <a:defRPr sz="1150">
+                <a:solidFill>
+                  <a:srgbClr val="64748B"/>
+                </a:solidFill>
+              </a:defRPr>
+            </a:pPr>
+            <a:r>
+              <a:t>Theo dõi tình trạng đơn hàng toàn hệ thống và điều phối giao vận</a:t>
+            </a:r>
+          </a:p>
+        </p:txBody>
+      </p:sp>
+      <p:sp>
+        <p:nvSpPr>
+          <p:cNvPr id="6" name="Rounded Rectangle 5"/>
           <p:cNvSpPr/>
           <p:nvPr/>
         </p:nvSpPr>
         <p:spPr>
           <a:xfrm>
-            <a:off x="731520" y="1645920"/>
-            <a:ext cx="5212080" cy="4480560"/>
+            <a:off x="731520" y="1554480"/>
+            <a:ext cx="4114800" cy="4846320"/>
           </a:xfrm>
           <a:prstGeom prst="roundRect">
             <a:avLst/>
@@ -6219,9 +5592,9 @@
           <a:solidFill>
             <a:srgbClr val="FFFFFF"/>
           </a:solidFill>
-          <a:ln w="19050">
+          <a:ln>
             <a:solidFill>
-              <a:srgbClr val="059669"/>
+              <a:srgbClr val="E2E8F0"/>
             </a:solidFill>
           </a:ln>
         </p:spPr>
@@ -6240,120 +5613,172 @@
           </a:fontRef>
         </p:style>
         <p:txBody>
-          <a:bodyPr rtlCol="0" anchor="ctr" wrap="square" lIns="274320" rIns="274320" tIns="274320"/>
-          <a:lstStyle/>
-          <a:p>
-            <a:pPr algn="ctr">
-              <a:defRPr sz="1300" b="1">
-                <a:solidFill>
-                  <a:srgbClr val="059669"/>
-                </a:solidFill>
-              </a:defRPr>
-            </a:pPr>
-            <a:r>
-              <a:t>KẾT QUẢ ĐẠT ĐƯỢC (VƯỢT TIẾN ĐỘ ĐỢT 1)</a:t>
-            </a:r>
-          </a:p>
-          <a:p>
-            <a:pPr>
-              <a:defRPr sz="1800" b="1">
-                <a:solidFill>
-                  <a:srgbClr val="111827"/>
-                </a:solidFill>
-              </a:defRPr>
-            </a:pPr>
-            <a:r>
-              <a:t>Hệ Thống Đã Vận Hành Ổn Định 100%</a:t>
-            </a:r>
-          </a:p>
-          <a:p>
-            <a:pPr>
-              <a:defRPr sz="1300">
-                <a:solidFill>
-                  <a:srgbClr val="6B7280"/>
-                </a:solidFill>
-              </a:defRPr>
-            </a:pPr>
-            <a:r>
-              <a:t>✔ Hoàn thành toàn bộ kiến trúc TMĐT cốt lõi: Catalog, Giỏ hàng, Sổ địa chỉ, Checkout, Thanh toán QR &amp; COD.</a:t>
-            </a:r>
-          </a:p>
-          <a:p>
-            <a:pPr>
-              <a:defRPr sz="1300">
-                <a:solidFill>
-                  <a:srgbClr val="6B7280"/>
-                </a:solidFill>
-              </a:defRPr>
-            </a:pPr>
-            <a:r>
-              <a:t>✔ Xây dựng thành công bộ dữ liệu 55 sản phẩm với 118 biến thể màu sắc có kết cấu 3D tương ứng.</a:t>
-            </a:r>
-          </a:p>
-          <a:p>
-            <a:pPr>
-              <a:defRPr sz="1300">
-                <a:solidFill>
-                  <a:srgbClr val="6B7280"/>
-                </a:solidFill>
-              </a:defRPr>
-            </a:pPr>
-            <a:r>
-              <a:t>✔ Phòng thử đồ 3D hoạt động mượt mà trên Web, hỗ trợ thử áo thun, sơ mi, quần dài, chân váy.</a:t>
-            </a:r>
-          </a:p>
-          <a:p>
-            <a:pPr>
-              <a:defRPr sz="1300">
-                <a:solidFill>
-                  <a:srgbClr val="6B7280"/>
-                </a:solidFill>
-              </a:defRPr>
-            </a:pPr>
-            <a:r>
-              <a:t>✔ Đột phá AI Stylist: Tích hợp Gemini LLM gợi ý combo cá nhân hóa theo số đo, lịch sử tìm kiếm &amp; đơn hàng cũ.</a:t>
-            </a:r>
-          </a:p>
-          <a:p>
-            <a:pPr>
-              <a:defRPr sz="1300">
-                <a:solidFill>
-                  <a:srgbClr val="6B7280"/>
-                </a:solidFill>
-              </a:defRPr>
-            </a:pPr>
-            <a:r>
-              <a:t>✔ Tích hợp thành công API thật của bưu cục Giao Hàng Nhanh (GHN) và module in phiếu đóng hàng bưu điện.</a:t>
-            </a:r>
-          </a:p>
-          <a:p>
-            <a:r>
-              <a:t>✔ Bộ kiểm thử tự động toàn diện: 78 backend pytest, 60 node integration tests, 70 vitest UI tests đều pass 100%.</a:t>
-            </a:r>
-          </a:p>
-        </p:txBody>
-      </p:sp>
-      <p:sp>
-        <p:nvSpPr>
-          <p:cNvPr id="6" name="Rounded Rectangle 5"/>
+          <a:bodyPr rtlCol="0" anchor="ctr"/>
+          <a:lstStyle/>
+          <a:p>
+            <a:pPr algn="ctr"/>
+          </a:p>
+        </p:txBody>
+      </p:sp>
+      <p:sp>
+        <p:nvSpPr>
+          <p:cNvPr id="7" name="TextBox 6"/>
+          <p:cNvSpPr txBox="1"/>
+          <p:nvPr/>
+        </p:nvSpPr>
+        <p:spPr>
+          <a:xfrm>
+            <a:off x="914400" y="1737360"/>
+            <a:ext cx="3749039" cy="4480560"/>
+          </a:xfrm>
+          <a:prstGeom prst="rect">
+            <a:avLst/>
+          </a:prstGeom>
+          <a:noFill/>
+        </p:spPr>
+        <p:txBody>
+          <a:bodyPr wrap="square">
+            <a:spAutoFit/>
+          </a:bodyPr>
+          <a:lstStyle/>
+          <a:p>
+            <a:pPr>
+              <a:spcAft>
+                <a:spcPts val="1200"/>
+              </a:spcAft>
+              <a:defRPr sz="1200" b="1">
+                <a:solidFill>
+                  <a:srgbClr val="2563EB"/>
+                </a:solidFill>
+              </a:defRPr>
+            </a:pPr>
+            <a:r>
+              <a:t>CÁC ĐIỂM NỔI BẬT</a:t>
+            </a:r>
+          </a:p>
+          <a:p>
+            <a:pPr>
+              <a:spcAft>
+                <a:spcPts val="800"/>
+              </a:spcAft>
+              <a:defRPr sz="1050">
+                <a:solidFill>
+                  <a:srgbClr val="1E293B"/>
+                </a:solidFill>
+              </a:defRPr>
+            </a:pPr>
+            <a:r>
+              <a:t>✔ Dashboard Admin: Quản lý danh sách đơn hàng đã đặt của khách.</a:t>
+            </a:r>
+          </a:p>
+          <a:p>
+            <a:pPr>
+              <a:spcAft>
+                <a:spcPts val="800"/>
+              </a:spcAft>
+              <a:defRPr sz="1050">
+                <a:solidFill>
+                  <a:srgbClr val="1E293B"/>
+                </a:solidFill>
+              </a:defRPr>
+            </a:pPr>
+            <a:r>
+              <a:t>✔ Xem chi tiết sản phẩm, số đo khách hàng, số điện thoại và địa chỉ giao hàng.</a:t>
+            </a:r>
+          </a:p>
+          <a:p>
+            <a:pPr>
+              <a:spcAft>
+                <a:spcPts val="800"/>
+              </a:spcAft>
+              <a:defRPr sz="1050">
+                <a:solidFill>
+                  <a:srgbClr val="1E293B"/>
+                </a:solidFill>
+              </a:defRPr>
+            </a:pPr>
+            <a:r>
+              <a:t>✔ Nút duyệt đơn chuyển trạng thái sang Chuẩn bị đóng gói.</a:t>
+            </a:r>
+          </a:p>
+          <a:p>
+            <a:pPr>
+              <a:spcAft>
+                <a:spcPts val="800"/>
+              </a:spcAft>
+              <a:defRPr sz="1050">
+                <a:solidFill>
+                  <a:srgbClr val="1E293B"/>
+                </a:solidFill>
+              </a:defRPr>
+            </a:pPr>
+            <a:r>
+              <a:t>✔ Nút 'Tạo vận đơn GHN': Gọi API bưu điện Giao Hàng Nhanh sinh mã bưu cục thật.</a:t>
+            </a:r>
+          </a:p>
+        </p:txBody>
+      </p:sp>
+      <p:pic>
+        <p:nvPicPr>
+          <p:cNvPr id="8" name="Picture 7" descr="shot_06_admin.png"/>
+          <p:cNvPicPr>
+            <a:picLocks noChangeAspect="1"/>
+          </p:cNvPicPr>
+          <p:nvPr/>
+        </p:nvPicPr>
+        <p:blipFill>
+          <a:blip r:embed="rId2"/>
+          <a:stretch>
+            <a:fillRect/>
+          </a:stretch>
+        </p:blipFill>
+        <p:spPr>
+          <a:xfrm>
+            <a:off x="5029200" y="1554480"/>
+            <a:ext cx="6400800" cy="4846320"/>
+          </a:xfrm>
+          <a:prstGeom prst="rect">
+            <a:avLst/>
+          </a:prstGeom>
+        </p:spPr>
+      </p:pic>
+    </p:spTree>
+  </p:cSld>
+  <p:clrMapOvr>
+    <a:masterClrMapping/>
+  </p:clrMapOvr>
+</p:sld>
+</file>
+
+<file path=ppt/slides/slide8.xml><?xml version="1.0" encoding="utf-8"?>
+<p:sld xmlns:a="http://schemas.openxmlformats.org/drawingml/2006/main" xmlns:p="http://schemas.openxmlformats.org/presentationml/2006/main" xmlns:r="http://schemas.openxmlformats.org/officeDocument/2006/relationships">
+  <p:cSld>
+    <p:spTree>
+      <p:nvGrpSpPr>
+        <p:cNvPr id="1" name=""/>
+        <p:cNvGrpSpPr/>
+        <p:nvPr/>
+      </p:nvGrpSpPr>
+      <p:grpSpPr/>
+      <p:sp>
+        <p:nvSpPr>
+          <p:cNvPr id="2" name="Rectangle 1"/>
           <p:cNvSpPr/>
           <p:nvPr/>
         </p:nvSpPr>
         <p:spPr>
           <a:xfrm>
-            <a:off x="6217920" y="1645920"/>
-            <a:ext cx="5212080" cy="4480560"/>
-          </a:xfrm>
-          <a:prstGeom prst="roundRect">
+            <a:off x="0" y="0"/>
+            <a:ext cx="12188952" cy="6858000"/>
+          </a:xfrm>
+          <a:prstGeom prst="rect">
             <a:avLst/>
           </a:prstGeom>
           <a:solidFill>
-            <a:srgbClr val="FFFFFF"/>
+            <a:srgbClr val="F8FAFC"/>
           </a:solidFill>
           <a:ln>
-            <a:solidFill>
-              <a:srgbClr val="E2E4E9"/>
-            </a:solidFill>
+            <a:noFill/>
           </a:ln>
         </p:spPr>
         <p:style>
@@ -6371,82 +5796,618 @@
           </a:fontRef>
         </p:style>
         <p:txBody>
-          <a:bodyPr rtlCol="0" anchor="ctr" wrap="square" lIns="274320" rIns="274320" tIns="274320"/>
-          <a:lstStyle/>
-          <a:p>
-            <a:pPr algn="ctr">
-              <a:defRPr sz="1300" b="1">
-                <a:solidFill>
-                  <a:srgbClr val="C2985B"/>
-                </a:solidFill>
-              </a:defRPr>
-            </a:pPr>
-            <a:r>
-              <a:t>KẾ HOẠCH NƯỚC RÚT (11/2026 – 12/2026)</a:t>
-            </a:r>
-          </a:p>
-          <a:p>
-            <a:pPr>
-              <a:defRPr sz="1800" b="1">
-                <a:solidFill>
-                  <a:srgbClr val="111827"/>
-                </a:solidFill>
-              </a:defRPr>
-            </a:pPr>
-            <a:r>
-              <a:t>Chuẩn Bị Bảo Vệ Luận Văn Tốt Nghiệp</a:t>
-            </a:r>
-          </a:p>
-          <a:p>
-            <a:pPr>
-              <a:defRPr sz="1300">
-                <a:solidFill>
-                  <a:srgbClr val="6B7280"/>
-                </a:solidFill>
-              </a:defRPr>
-            </a:pPr>
-            <a:r>
-              <a:t>➔ Tháng 11/2026: Tối ưu hiệu năng WebGL/Three.js trên thiết bị di động (Mobile Responsive 3D).</a:t>
-            </a:r>
-          </a:p>
-          <a:p>
-            <a:pPr>
-              <a:defRPr sz="1300">
-                <a:solidFill>
-                  <a:srgbClr val="6B7280"/>
-                </a:solidFill>
-              </a:defRPr>
-            </a:pPr>
-            <a:r>
-              <a:t>➔ Tháng 11/2026: Mở rộng các phom đồ nâng cao trong phòng thử 3D (Áo khoác Blazer, Đầm liền).</a:t>
-            </a:r>
-          </a:p>
-          <a:p>
-            <a:pPr>
-              <a:defRPr sz="1300">
-                <a:solidFill>
-                  <a:srgbClr val="6B7280"/>
-                </a:solidFill>
-              </a:defRPr>
-            </a:pPr>
-            <a:r>
-              <a:t>➔ Đầu tháng 12/2026: Hoàn thiện báo cáo luận văn tốt nghiệp theo đúng format quy chuẩn trường.</a:t>
-            </a:r>
-          </a:p>
-          <a:p>
-            <a:pPr>
-              <a:defRPr sz="1300">
-                <a:solidFill>
-                  <a:srgbClr val="6B7280"/>
-                </a:solidFill>
-              </a:defRPr>
-            </a:pPr>
-            <a:r>
-              <a:t>➔ Giữa tháng 12/2026: Đóng gói bản cài đặt production, chuẩn bị video demo dự phòng và bảo vệ chính thức.</a:t>
-            </a:r>
-          </a:p>
-        </p:txBody>
-      </p:sp>
+          <a:bodyPr rtlCol="0" anchor="ctr"/>
+          <a:lstStyle/>
+          <a:p>
+            <a:pPr algn="ctr"/>
+          </a:p>
+        </p:txBody>
+      </p:sp>
+      <p:sp>
+        <p:nvSpPr>
+          <p:cNvPr id="3" name="TextBox 2"/>
+          <p:cNvSpPr txBox="1"/>
+          <p:nvPr/>
+        </p:nvSpPr>
+        <p:spPr>
+          <a:xfrm>
+            <a:off x="731520" y="320040"/>
+            <a:ext cx="7315200" cy="320040"/>
+          </a:xfrm>
+          <a:prstGeom prst="rect">
+            <a:avLst/>
+          </a:prstGeom>
+          <a:noFill/>
+        </p:spPr>
+        <p:txBody>
+          <a:bodyPr wrap="square">
+            <a:spAutoFit/>
+          </a:bodyPr>
+          <a:lstStyle/>
+          <a:p>
+            <a:pPr>
+              <a:defRPr sz="1100" b="1">
+                <a:solidFill>
+                  <a:srgbClr val="2563EB"/>
+                </a:solidFill>
+              </a:defRPr>
+            </a:pPr>
+            <a:r>
+              <a:t>MÀN HÌNH 07</a:t>
+            </a:r>
+          </a:p>
+        </p:txBody>
+      </p:sp>
+      <p:sp>
+        <p:nvSpPr>
+          <p:cNvPr id="4" name="TextBox 3"/>
+          <p:cNvSpPr txBox="1"/>
+          <p:nvPr/>
+        </p:nvSpPr>
+        <p:spPr>
+          <a:xfrm>
+            <a:off x="731520" y="594360"/>
+            <a:ext cx="10515600" cy="502920"/>
+          </a:xfrm>
+          <a:prstGeom prst="rect">
+            <a:avLst/>
+          </a:prstGeom>
+          <a:noFill/>
+        </p:spPr>
+        <p:txBody>
+          <a:bodyPr wrap="square">
+            <a:spAutoFit/>
+          </a:bodyPr>
+          <a:lstStyle/>
+          <a:p>
+            <a:pPr>
+              <a:defRPr sz="2000" b="1">
+                <a:solidFill>
+                  <a:srgbClr val="0F172A"/>
+                </a:solidFill>
+              </a:defRPr>
+            </a:pPr>
+            <a:r>
+              <a:t>Bưu Cục Giao Hàng Nhanh Thật (5sao.ghn.dev)</a:t>
+            </a:r>
+          </a:p>
+        </p:txBody>
+      </p:sp>
+      <p:sp>
+        <p:nvSpPr>
+          <p:cNvPr id="5" name="TextBox 4"/>
+          <p:cNvSpPr txBox="1"/>
+          <p:nvPr/>
+        </p:nvSpPr>
+        <p:spPr>
+          <a:xfrm>
+            <a:off x="731520" y="1097280"/>
+            <a:ext cx="10515600" cy="320040"/>
+          </a:xfrm>
+          <a:prstGeom prst="rect">
+            <a:avLst/>
+          </a:prstGeom>
+          <a:noFill/>
+        </p:spPr>
+        <p:txBody>
+          <a:bodyPr wrap="square">
+            <a:spAutoFit/>
+          </a:bodyPr>
+          <a:lstStyle/>
+          <a:p>
+            <a:pPr>
+              <a:defRPr sz="1150">
+                <a:solidFill>
+                  <a:srgbClr val="64748B"/>
+                </a:solidFill>
+              </a:defRPr>
+            </a:pPr>
+            <a:r>
+              <a:t>Đơn hàng được đồng bộ tự động lên cổng bưu tá chính thức của GHN</a:t>
+            </a:r>
+          </a:p>
+        </p:txBody>
+      </p:sp>
+      <p:sp>
+        <p:nvSpPr>
+          <p:cNvPr id="6" name="Rounded Rectangle 5"/>
+          <p:cNvSpPr/>
+          <p:nvPr/>
+        </p:nvSpPr>
+        <p:spPr>
+          <a:xfrm>
+            <a:off x="731520" y="1554480"/>
+            <a:ext cx="4114800" cy="4846320"/>
+          </a:xfrm>
+          <a:prstGeom prst="roundRect">
+            <a:avLst/>
+          </a:prstGeom>
+          <a:solidFill>
+            <a:srgbClr val="FFFFFF"/>
+          </a:solidFill>
+          <a:ln>
+            <a:solidFill>
+              <a:srgbClr val="E2E8F0"/>
+            </a:solidFill>
+          </a:ln>
+        </p:spPr>
+        <p:style>
+          <a:lnRef idx="1">
+            <a:schemeClr val="accent1"/>
+          </a:lnRef>
+          <a:fillRef idx="3">
+            <a:schemeClr val="accent1"/>
+          </a:fillRef>
+          <a:effectRef idx="2">
+            <a:schemeClr val="accent1"/>
+          </a:effectRef>
+          <a:fontRef idx="minor">
+            <a:schemeClr val="lt1"/>
+          </a:fontRef>
+        </p:style>
+        <p:txBody>
+          <a:bodyPr rtlCol="0" anchor="ctr"/>
+          <a:lstStyle/>
+          <a:p>
+            <a:pPr algn="ctr"/>
+          </a:p>
+        </p:txBody>
+      </p:sp>
+      <p:sp>
+        <p:nvSpPr>
+          <p:cNvPr id="7" name="TextBox 6"/>
+          <p:cNvSpPr txBox="1"/>
+          <p:nvPr/>
+        </p:nvSpPr>
+        <p:spPr>
+          <a:xfrm>
+            <a:off x="914400" y="1737360"/>
+            <a:ext cx="3749039" cy="4480560"/>
+          </a:xfrm>
+          <a:prstGeom prst="rect">
+            <a:avLst/>
+          </a:prstGeom>
+          <a:noFill/>
+        </p:spPr>
+        <p:txBody>
+          <a:bodyPr wrap="square">
+            <a:spAutoFit/>
+          </a:bodyPr>
+          <a:lstStyle/>
+          <a:p>
+            <a:pPr>
+              <a:spcAft>
+                <a:spcPts val="1200"/>
+              </a:spcAft>
+              <a:defRPr sz="1200" b="1">
+                <a:solidFill>
+                  <a:srgbClr val="2563EB"/>
+                </a:solidFill>
+              </a:defRPr>
+            </a:pPr>
+            <a:r>
+              <a:t>CÁC ĐIỂM NỔI BẬT</a:t>
+            </a:r>
+          </a:p>
+          <a:p>
+            <a:pPr>
+              <a:spcAft>
+                <a:spcPts val="800"/>
+              </a:spcAft>
+              <a:defRPr sz="1050">
+                <a:solidFill>
+                  <a:srgbClr val="1E293B"/>
+                </a:solidFill>
+              </a:defRPr>
+            </a:pPr>
+            <a:r>
+              <a:t>✔ Kết nối API GHN Sandbox thực tế với Shop ID chính thức: 233442.</a:t>
+            </a:r>
+          </a:p>
+          <a:p>
+            <a:pPr>
+              <a:spcAft>
+                <a:spcPts val="800"/>
+              </a:spcAft>
+              <a:defRPr sz="1050">
+                <a:solidFill>
+                  <a:srgbClr val="1E293B"/>
+                </a:solidFill>
+              </a:defRPr>
+            </a:pPr>
+            <a:r>
+              <a:t>✔ Tự động tính cước vận chuyển chuẩn bưu điện và khớp tiền thu hộ COD.</a:t>
+            </a:r>
+          </a:p>
+          <a:p>
+            <a:pPr>
+              <a:spcAft>
+                <a:spcPts val="800"/>
+              </a:spcAft>
+              <a:defRPr sz="1050">
+                <a:solidFill>
+                  <a:srgbClr val="1E293B"/>
+                </a:solidFill>
+              </a:defRPr>
+            </a:pPr>
+            <a:r>
+              <a:t>✔ Đơn hàng hiển thị ngay lập tức trên hệ thống điều phối bưu tá GHN.</a:t>
+            </a:r>
+          </a:p>
+          <a:p>
+            <a:pPr>
+              <a:spcAft>
+                <a:spcPts val="800"/>
+              </a:spcAft>
+              <a:defRPr sz="1050">
+                <a:solidFill>
+                  <a:srgbClr val="1E293B"/>
+                </a:solidFill>
+              </a:defRPr>
+            </a:pPr>
+            <a:r>
+              <a:t>✔ Mã vận đơn chính thức (VD: LYQGW4) cập nhật xuyên suốt cho khách tra cứu.</a:t>
+            </a:r>
+          </a:p>
+        </p:txBody>
+      </p:sp>
+      <p:pic>
+        <p:nvPicPr>
+          <p:cNvPr id="8" name="Picture 7" descr="shot_07_ghn_dashboard.png"/>
+          <p:cNvPicPr>
+            <a:picLocks noChangeAspect="1"/>
+          </p:cNvPicPr>
+          <p:nvPr/>
+        </p:nvPicPr>
+        <p:blipFill>
+          <a:blip r:embed="rId2"/>
+          <a:stretch>
+            <a:fillRect/>
+          </a:stretch>
+        </p:blipFill>
+        <p:spPr>
+          <a:xfrm>
+            <a:off x="5029200" y="1554480"/>
+            <a:ext cx="6400800" cy="4846320"/>
+          </a:xfrm>
+          <a:prstGeom prst="rect">
+            <a:avLst/>
+          </a:prstGeom>
+        </p:spPr>
+      </p:pic>
+    </p:spTree>
+  </p:cSld>
+  <p:clrMapOvr>
+    <a:masterClrMapping/>
+  </p:clrMapOvr>
+</p:sld>
+</file>
+
+<file path=ppt/slides/slide9.xml><?xml version="1.0" encoding="utf-8"?>
+<p:sld xmlns:a="http://schemas.openxmlformats.org/drawingml/2006/main" xmlns:p="http://schemas.openxmlformats.org/presentationml/2006/main" xmlns:r="http://schemas.openxmlformats.org/officeDocument/2006/relationships">
+  <p:cSld>
+    <p:spTree>
+      <p:nvGrpSpPr>
+        <p:cNvPr id="1" name=""/>
+        <p:cNvGrpSpPr/>
+        <p:nvPr/>
+      </p:nvGrpSpPr>
+      <p:grpSpPr/>
+      <p:sp>
+        <p:nvSpPr>
+          <p:cNvPr id="2" name="Rectangle 1"/>
+          <p:cNvSpPr/>
+          <p:nvPr/>
+        </p:nvSpPr>
+        <p:spPr>
+          <a:xfrm>
+            <a:off x="0" y="0"/>
+            <a:ext cx="12188952" cy="6858000"/>
+          </a:xfrm>
+          <a:prstGeom prst="rect">
+            <a:avLst/>
+          </a:prstGeom>
+          <a:solidFill>
+            <a:srgbClr val="F8FAFC"/>
+          </a:solidFill>
+          <a:ln>
+            <a:noFill/>
+          </a:ln>
+        </p:spPr>
+        <p:style>
+          <a:lnRef idx="1">
+            <a:schemeClr val="accent1"/>
+          </a:lnRef>
+          <a:fillRef idx="3">
+            <a:schemeClr val="accent1"/>
+          </a:fillRef>
+          <a:effectRef idx="2">
+            <a:schemeClr val="accent1"/>
+          </a:effectRef>
+          <a:fontRef idx="minor">
+            <a:schemeClr val="lt1"/>
+          </a:fontRef>
+        </p:style>
+        <p:txBody>
+          <a:bodyPr rtlCol="0" anchor="ctr"/>
+          <a:lstStyle/>
+          <a:p>
+            <a:pPr algn="ctr"/>
+          </a:p>
+        </p:txBody>
+      </p:sp>
+      <p:sp>
+        <p:nvSpPr>
+          <p:cNvPr id="3" name="TextBox 2"/>
+          <p:cNvSpPr txBox="1"/>
+          <p:nvPr/>
+        </p:nvSpPr>
+        <p:spPr>
+          <a:xfrm>
+            <a:off x="731520" y="320040"/>
+            <a:ext cx="7315200" cy="320040"/>
+          </a:xfrm>
+          <a:prstGeom prst="rect">
+            <a:avLst/>
+          </a:prstGeom>
+          <a:noFill/>
+        </p:spPr>
+        <p:txBody>
+          <a:bodyPr wrap="square">
+            <a:spAutoFit/>
+          </a:bodyPr>
+          <a:lstStyle/>
+          <a:p>
+            <a:pPr>
+              <a:defRPr sz="1100" b="1">
+                <a:solidFill>
+                  <a:srgbClr val="2563EB"/>
+                </a:solidFill>
+              </a:defRPr>
+            </a:pPr>
+            <a:r>
+              <a:t>MÀN HÌNH 08</a:t>
+            </a:r>
+          </a:p>
+        </p:txBody>
+      </p:sp>
+      <p:sp>
+        <p:nvSpPr>
+          <p:cNvPr id="4" name="TextBox 3"/>
+          <p:cNvSpPr txBox="1"/>
+          <p:nvPr/>
+        </p:nvSpPr>
+        <p:spPr>
+          <a:xfrm>
+            <a:off x="731520" y="594360"/>
+            <a:ext cx="10515600" cy="502920"/>
+          </a:xfrm>
+          <a:prstGeom prst="rect">
+            <a:avLst/>
+          </a:prstGeom>
+          <a:noFill/>
+        </p:spPr>
+        <p:txBody>
+          <a:bodyPr wrap="square">
+            <a:spAutoFit/>
+          </a:bodyPr>
+          <a:lstStyle/>
+          <a:p>
+            <a:pPr>
+              <a:defRPr sz="2000" b="1">
+                <a:solidFill>
+                  <a:srgbClr val="0F172A"/>
+                </a:solidFill>
+              </a:defRPr>
+            </a:pPr>
+            <a:r>
+              <a:t>Phiếu In Giao Hàng Bưu Điện Khổ A4/A5</a:t>
+            </a:r>
+          </a:p>
+        </p:txBody>
+      </p:sp>
+      <p:sp>
+        <p:nvSpPr>
+          <p:cNvPr id="5" name="TextBox 4"/>
+          <p:cNvSpPr txBox="1"/>
+          <p:nvPr/>
+        </p:nvSpPr>
+        <p:spPr>
+          <a:xfrm>
+            <a:off x="731520" y="1097280"/>
+            <a:ext cx="10515600" cy="320040"/>
+          </a:xfrm>
+          <a:prstGeom prst="rect">
+            <a:avLst/>
+          </a:prstGeom>
+          <a:noFill/>
+        </p:spPr>
+        <p:txBody>
+          <a:bodyPr wrap="square">
+            <a:spAutoFit/>
+          </a:bodyPr>
+          <a:lstStyle/>
+          <a:p>
+            <a:pPr>
+              <a:defRPr sz="1150">
+                <a:solidFill>
+                  <a:srgbClr val="64748B"/>
+                </a:solidFill>
+              </a:defRPr>
+            </a:pPr>
+            <a:r>
+              <a:t>Tự động sinh mã vạch Barcode SVG, ô tiền COD nổi bật để dán thùng hàng</a:t>
+            </a:r>
+          </a:p>
+        </p:txBody>
+      </p:sp>
+      <p:sp>
+        <p:nvSpPr>
+          <p:cNvPr id="6" name="Rounded Rectangle 5"/>
+          <p:cNvSpPr/>
+          <p:nvPr/>
+        </p:nvSpPr>
+        <p:spPr>
+          <a:xfrm>
+            <a:off x="731520" y="1554480"/>
+            <a:ext cx="4114800" cy="4846320"/>
+          </a:xfrm>
+          <a:prstGeom prst="roundRect">
+            <a:avLst/>
+          </a:prstGeom>
+          <a:solidFill>
+            <a:srgbClr val="FFFFFF"/>
+          </a:solidFill>
+          <a:ln>
+            <a:solidFill>
+              <a:srgbClr val="E2E8F0"/>
+            </a:solidFill>
+          </a:ln>
+        </p:spPr>
+        <p:style>
+          <a:lnRef idx="1">
+            <a:schemeClr val="accent1"/>
+          </a:lnRef>
+          <a:fillRef idx="3">
+            <a:schemeClr val="accent1"/>
+          </a:fillRef>
+          <a:effectRef idx="2">
+            <a:schemeClr val="accent1"/>
+          </a:effectRef>
+          <a:fontRef idx="minor">
+            <a:schemeClr val="lt1"/>
+          </a:fontRef>
+        </p:style>
+        <p:txBody>
+          <a:bodyPr rtlCol="0" anchor="ctr"/>
+          <a:lstStyle/>
+          <a:p>
+            <a:pPr algn="ctr"/>
+          </a:p>
+        </p:txBody>
+      </p:sp>
+      <p:sp>
+        <p:nvSpPr>
+          <p:cNvPr id="7" name="TextBox 6"/>
+          <p:cNvSpPr txBox="1"/>
+          <p:nvPr/>
+        </p:nvSpPr>
+        <p:spPr>
+          <a:xfrm>
+            <a:off x="914400" y="1737360"/>
+            <a:ext cx="3749039" cy="4480560"/>
+          </a:xfrm>
+          <a:prstGeom prst="rect">
+            <a:avLst/>
+          </a:prstGeom>
+          <a:noFill/>
+        </p:spPr>
+        <p:txBody>
+          <a:bodyPr wrap="square">
+            <a:spAutoFit/>
+          </a:bodyPr>
+          <a:lstStyle/>
+          <a:p>
+            <a:pPr>
+              <a:spcAft>
+                <a:spcPts val="1200"/>
+              </a:spcAft>
+              <a:defRPr sz="1200" b="1">
+                <a:solidFill>
+                  <a:srgbClr val="2563EB"/>
+                </a:solidFill>
+              </a:defRPr>
+            </a:pPr>
+            <a:r>
+              <a:t>CÁC ĐIỂM NỔI BẬT</a:t>
+            </a:r>
+          </a:p>
+          <a:p>
+            <a:pPr>
+              <a:spcAft>
+                <a:spcPts val="800"/>
+              </a:spcAft>
+              <a:defRPr sz="1050">
+                <a:solidFill>
+                  <a:srgbClr val="1E293B"/>
+                </a:solidFill>
+              </a:defRPr>
+            </a:pPr>
+            <a:r>
+              <a:t>✔ 1-Click bấm 'In phiếu giao hàng / Xuất PDF' ngay trên giao diện đơn hàng.</a:t>
+            </a:r>
+          </a:p>
+          <a:p>
+            <a:pPr>
+              <a:spcAft>
+                <a:spcPts val="800"/>
+              </a:spcAft>
+              <a:defRPr sz="1050">
+                <a:solidFill>
+                  <a:srgbClr val="1E293B"/>
+                </a:solidFill>
+              </a:defRPr>
+            </a:pPr>
+            <a:r>
+              <a:t>✔ Mẫu in chuẩn bưu điện: Thông tin shop gửi, thông tin người nhận rõ ràng.</a:t>
+            </a:r>
+          </a:p>
+          <a:p>
+            <a:pPr>
+              <a:spcAft>
+                <a:spcPts val="800"/>
+              </a:spcAft>
+              <a:defRPr sz="1050">
+                <a:solidFill>
+                  <a:srgbClr val="1E293B"/>
+                </a:solidFill>
+              </a:defRPr>
+            </a:pPr>
+            <a:r>
+              <a:t>✔ Mã vạch Barcode SVG sắc nét phục vụ máy quét bưu cục khi lấy hàng.</a:t>
+            </a:r>
+          </a:p>
+          <a:p>
+            <a:pPr>
+              <a:spcAft>
+                <a:spcPts val="800"/>
+              </a:spcAft>
+              <a:defRPr sz="1050">
+                <a:solidFill>
+                  <a:srgbClr val="1E293B"/>
+                </a:solidFill>
+              </a:defRPr>
+            </a:pPr>
+            <a:r>
+              <a:t>✔ Khung tiền thu hộ COD nổi bật và chữ ký bàn giao chuẩn quy cách.</a:t>
+            </a:r>
+          </a:p>
+        </p:txBody>
+      </p:sp>
+      <p:pic>
+        <p:nvPicPr>
+          <p:cNvPr id="8" name="Picture 7" descr="shot_08_ghn_print_slip.png"/>
+          <p:cNvPicPr>
+            <a:picLocks noChangeAspect="1"/>
+          </p:cNvPicPr>
+          <p:nvPr/>
+        </p:nvPicPr>
+        <p:blipFill>
+          <a:blip r:embed="rId2"/>
+          <a:stretch>
+            <a:fillRect/>
+          </a:stretch>
+        </p:blipFill>
+        <p:spPr>
+          <a:xfrm>
+            <a:off x="5029200" y="1554480"/>
+            <a:ext cx="6400800" cy="4846320"/>
+          </a:xfrm>
+          <a:prstGeom prst="rect">
+            <a:avLst/>
+          </a:prstGeom>
+        </p:spPr>
+      </p:pic>
     </p:spTree>
   </p:cSld>
   <p:clrMapOvr>

--- a/BaoCao_TienDo_DATN_N&B_Fashion.pptx
+++ b/BaoCao_TienDo_DATN_N&B_Fashion.pptx
@@ -3245,7 +3245,7 @@
               </a:defRPr>
             </a:pPr>
             <a:r>
-              <a:t>Bộ Ảnh Chụp Thực Tế 8 Màn Hình Tính Năng Đã Vận Hành Hoàn Thiện</a:t>
+              <a:t>Bộ Ảnh Chụp Thực Tế 8 Màn Hình Tính Năng (Tỷ Lệ Chuẩn 100%)</a:t>
             </a:r>
           </a:p>
           <a:p>
@@ -4053,9 +4053,54 @@
           </a:p>
         </p:txBody>
       </p:sp>
+      <p:sp>
+        <p:nvSpPr>
+          <p:cNvPr id="8" name="Rounded Rectangle 7"/>
+          <p:cNvSpPr/>
+          <p:nvPr/>
+        </p:nvSpPr>
+        <p:spPr>
+          <a:xfrm>
+            <a:off x="5029200" y="1554480"/>
+            <a:ext cx="6400800" cy="4846320"/>
+          </a:xfrm>
+          <a:prstGeom prst="roundRect">
+            <a:avLst/>
+          </a:prstGeom>
+          <a:solidFill>
+            <a:srgbClr val="F1F5F9"/>
+          </a:solidFill>
+          <a:ln>
+            <a:solidFill>
+              <a:srgbClr val="E2E8F0"/>
+            </a:solidFill>
+          </a:ln>
+        </p:spPr>
+        <p:style>
+          <a:lnRef idx="1">
+            <a:schemeClr val="accent1"/>
+          </a:lnRef>
+          <a:fillRef idx="3">
+            <a:schemeClr val="accent1"/>
+          </a:fillRef>
+          <a:effectRef idx="2">
+            <a:schemeClr val="accent1"/>
+          </a:effectRef>
+          <a:fontRef idx="minor">
+            <a:schemeClr val="lt1"/>
+          </a:fontRef>
+        </p:style>
+        <p:txBody>
+          <a:bodyPr rtlCol="0" anchor="ctr"/>
+          <a:lstStyle/>
+          <a:p>
+            <a:pPr algn="ctr"/>
+          </a:p>
+        </p:txBody>
+      </p:sp>
       <p:pic>
         <p:nvPicPr>
-          <p:cNvPr id="8" name="Picture 7" descr="shot_01_home.png"/>
+          <p:cNvPr id="9" name="Picture 8" descr="shot_01_home.png"/>
           <p:cNvPicPr>
             <a:picLocks noChangeAspect="1"/>
           </p:cNvPicPr>
@@ -4069,8 +4114,8 @@
         </p:blipFill>
         <p:spPr>
           <a:xfrm>
-            <a:off x="5029200" y="1554480"/>
-            <a:ext cx="6400800" cy="4846320"/>
+            <a:off x="5029200" y="2178294"/>
+            <a:ext cx="6400800" cy="3598692"/>
           </a:xfrm>
           <a:prstGeom prst="rect">
             <a:avLst/>
@@ -4386,9 +4431,54 @@
           </a:p>
         </p:txBody>
       </p:sp>
+      <p:sp>
+        <p:nvSpPr>
+          <p:cNvPr id="8" name="Rounded Rectangle 7"/>
+          <p:cNvSpPr/>
+          <p:nvPr/>
+        </p:nvSpPr>
+        <p:spPr>
+          <a:xfrm>
+            <a:off x="5029200" y="1554480"/>
+            <a:ext cx="6400800" cy="4846320"/>
+          </a:xfrm>
+          <a:prstGeom prst="roundRect">
+            <a:avLst/>
+          </a:prstGeom>
+          <a:solidFill>
+            <a:srgbClr val="F1F5F9"/>
+          </a:solidFill>
+          <a:ln>
+            <a:solidFill>
+              <a:srgbClr val="E2E8F0"/>
+            </a:solidFill>
+          </a:ln>
+        </p:spPr>
+        <p:style>
+          <a:lnRef idx="1">
+            <a:schemeClr val="accent1"/>
+          </a:lnRef>
+          <a:fillRef idx="3">
+            <a:schemeClr val="accent1"/>
+          </a:fillRef>
+          <a:effectRef idx="2">
+            <a:schemeClr val="accent1"/>
+          </a:effectRef>
+          <a:fontRef idx="minor">
+            <a:schemeClr val="lt1"/>
+          </a:fontRef>
+        </p:style>
+        <p:txBody>
+          <a:bodyPr rtlCol="0" anchor="ctr"/>
+          <a:lstStyle/>
+          <a:p>
+            <a:pPr algn="ctr"/>
+          </a:p>
+        </p:txBody>
+      </p:sp>
       <p:pic>
         <p:nvPicPr>
-          <p:cNvPr id="8" name="Picture 7" descr="shot_02_catalog.png"/>
+          <p:cNvPr id="9" name="Picture 8" descr="shot_02_catalog.png"/>
           <p:cNvPicPr>
             <a:picLocks noChangeAspect="1"/>
           </p:cNvPicPr>
@@ -4402,8 +4492,8 @@
         </p:blipFill>
         <p:spPr>
           <a:xfrm>
-            <a:off x="5029200" y="1554480"/>
-            <a:ext cx="6400800" cy="4846320"/>
+            <a:off x="5029200" y="2178294"/>
+            <a:ext cx="6400800" cy="3598692"/>
           </a:xfrm>
           <a:prstGeom prst="rect">
             <a:avLst/>
@@ -4719,9 +4809,54 @@
           </a:p>
         </p:txBody>
       </p:sp>
+      <p:sp>
+        <p:nvSpPr>
+          <p:cNvPr id="8" name="Rounded Rectangle 7"/>
+          <p:cNvSpPr/>
+          <p:nvPr/>
+        </p:nvSpPr>
+        <p:spPr>
+          <a:xfrm>
+            <a:off x="5029200" y="1554480"/>
+            <a:ext cx="6400800" cy="4846320"/>
+          </a:xfrm>
+          <a:prstGeom prst="roundRect">
+            <a:avLst/>
+          </a:prstGeom>
+          <a:solidFill>
+            <a:srgbClr val="F1F5F9"/>
+          </a:solidFill>
+          <a:ln>
+            <a:solidFill>
+              <a:srgbClr val="E2E8F0"/>
+            </a:solidFill>
+          </a:ln>
+        </p:spPr>
+        <p:style>
+          <a:lnRef idx="1">
+            <a:schemeClr val="accent1"/>
+          </a:lnRef>
+          <a:fillRef idx="3">
+            <a:schemeClr val="accent1"/>
+          </a:fillRef>
+          <a:effectRef idx="2">
+            <a:schemeClr val="accent1"/>
+          </a:effectRef>
+          <a:fontRef idx="minor">
+            <a:schemeClr val="lt1"/>
+          </a:fontRef>
+        </p:style>
+        <p:txBody>
+          <a:bodyPr rtlCol="0" anchor="ctr"/>
+          <a:lstStyle/>
+          <a:p>
+            <a:pPr algn="ctr"/>
+          </a:p>
+        </p:txBody>
+      </p:sp>
       <p:pic>
         <p:nvPicPr>
-          <p:cNvPr id="8" name="Picture 7" descr="shot_03_detail.png"/>
+          <p:cNvPr id="9" name="Picture 8" descr="shot_03_detail.png"/>
           <p:cNvPicPr>
             <a:picLocks noChangeAspect="1"/>
           </p:cNvPicPr>
@@ -4735,8 +4870,8 @@
         </p:blipFill>
         <p:spPr>
           <a:xfrm>
-            <a:off x="5029200" y="1554480"/>
-            <a:ext cx="6400800" cy="4846320"/>
+            <a:off x="5029200" y="2178294"/>
+            <a:ext cx="6400800" cy="3598692"/>
           </a:xfrm>
           <a:prstGeom prst="rect">
             <a:avLst/>
@@ -5052,9 +5187,54 @@
           </a:p>
         </p:txBody>
       </p:sp>
+      <p:sp>
+        <p:nvSpPr>
+          <p:cNvPr id="8" name="Rounded Rectangle 7"/>
+          <p:cNvSpPr/>
+          <p:nvPr/>
+        </p:nvSpPr>
+        <p:spPr>
+          <a:xfrm>
+            <a:off x="5029200" y="1554480"/>
+            <a:ext cx="6400800" cy="4846320"/>
+          </a:xfrm>
+          <a:prstGeom prst="roundRect">
+            <a:avLst/>
+          </a:prstGeom>
+          <a:solidFill>
+            <a:srgbClr val="F1F5F9"/>
+          </a:solidFill>
+          <a:ln>
+            <a:solidFill>
+              <a:srgbClr val="E2E8F0"/>
+            </a:solidFill>
+          </a:ln>
+        </p:spPr>
+        <p:style>
+          <a:lnRef idx="1">
+            <a:schemeClr val="accent1"/>
+          </a:lnRef>
+          <a:fillRef idx="3">
+            <a:schemeClr val="accent1"/>
+          </a:fillRef>
+          <a:effectRef idx="2">
+            <a:schemeClr val="accent1"/>
+          </a:effectRef>
+          <a:fontRef idx="minor">
+            <a:schemeClr val="lt1"/>
+          </a:fontRef>
+        </p:style>
+        <p:txBody>
+          <a:bodyPr rtlCol="0" anchor="ctr"/>
+          <a:lstStyle/>
+          <a:p>
+            <a:pPr algn="ctr"/>
+          </a:p>
+        </p:txBody>
+      </p:sp>
       <p:pic>
         <p:nvPicPr>
-          <p:cNvPr id="8" name="Picture 7" descr="shot_05_stylist.png"/>
+          <p:cNvPr id="9" name="Picture 8" descr="shot_05_stylist.png"/>
           <p:cNvPicPr>
             <a:picLocks noChangeAspect="1"/>
           </p:cNvPicPr>
@@ -5068,8 +5248,8 @@
         </p:blipFill>
         <p:spPr>
           <a:xfrm>
-            <a:off x="5029200" y="1554480"/>
-            <a:ext cx="6400800" cy="4846320"/>
+            <a:off x="5029200" y="2178294"/>
+            <a:ext cx="6400800" cy="3598692"/>
           </a:xfrm>
           <a:prstGeom prst="rect">
             <a:avLst/>
@@ -5385,9 +5565,54 @@
           </a:p>
         </p:txBody>
       </p:sp>
+      <p:sp>
+        <p:nvSpPr>
+          <p:cNvPr id="8" name="Rounded Rectangle 7"/>
+          <p:cNvSpPr/>
+          <p:nvPr/>
+        </p:nvSpPr>
+        <p:spPr>
+          <a:xfrm>
+            <a:off x="5029200" y="1554480"/>
+            <a:ext cx="6400800" cy="4846320"/>
+          </a:xfrm>
+          <a:prstGeom prst="roundRect">
+            <a:avLst/>
+          </a:prstGeom>
+          <a:solidFill>
+            <a:srgbClr val="F1F5F9"/>
+          </a:solidFill>
+          <a:ln>
+            <a:solidFill>
+              <a:srgbClr val="E2E8F0"/>
+            </a:solidFill>
+          </a:ln>
+        </p:spPr>
+        <p:style>
+          <a:lnRef idx="1">
+            <a:schemeClr val="accent1"/>
+          </a:lnRef>
+          <a:fillRef idx="3">
+            <a:schemeClr val="accent1"/>
+          </a:fillRef>
+          <a:effectRef idx="2">
+            <a:schemeClr val="accent1"/>
+          </a:effectRef>
+          <a:fontRef idx="minor">
+            <a:schemeClr val="lt1"/>
+          </a:fontRef>
+        </p:style>
+        <p:txBody>
+          <a:bodyPr rtlCol="0" anchor="ctr"/>
+          <a:lstStyle/>
+          <a:p>
+            <a:pPr algn="ctr"/>
+          </a:p>
+        </p:txBody>
+      </p:sp>
       <p:pic>
         <p:nvPicPr>
-          <p:cNvPr id="8" name="Picture 7" descr="shot_04_tryon.png"/>
+          <p:cNvPr id="9" name="Picture 8" descr="shot_04_tryon.png"/>
           <p:cNvPicPr>
             <a:picLocks noChangeAspect="1"/>
           </p:cNvPicPr>
@@ -5401,8 +5626,8 @@
         </p:blipFill>
         <p:spPr>
           <a:xfrm>
-            <a:off x="5029200" y="1554480"/>
-            <a:ext cx="6400800" cy="4846320"/>
+            <a:off x="5029200" y="2178294"/>
+            <a:ext cx="6400800" cy="3598692"/>
           </a:xfrm>
           <a:prstGeom prst="rect">
             <a:avLst/>
@@ -5718,9 +5943,54 @@
           </a:p>
         </p:txBody>
       </p:sp>
+      <p:sp>
+        <p:nvSpPr>
+          <p:cNvPr id="8" name="Rounded Rectangle 7"/>
+          <p:cNvSpPr/>
+          <p:nvPr/>
+        </p:nvSpPr>
+        <p:spPr>
+          <a:xfrm>
+            <a:off x="5029200" y="1554480"/>
+            <a:ext cx="6400800" cy="4846320"/>
+          </a:xfrm>
+          <a:prstGeom prst="roundRect">
+            <a:avLst/>
+          </a:prstGeom>
+          <a:solidFill>
+            <a:srgbClr val="F1F5F9"/>
+          </a:solidFill>
+          <a:ln>
+            <a:solidFill>
+              <a:srgbClr val="E2E8F0"/>
+            </a:solidFill>
+          </a:ln>
+        </p:spPr>
+        <p:style>
+          <a:lnRef idx="1">
+            <a:schemeClr val="accent1"/>
+          </a:lnRef>
+          <a:fillRef idx="3">
+            <a:schemeClr val="accent1"/>
+          </a:fillRef>
+          <a:effectRef idx="2">
+            <a:schemeClr val="accent1"/>
+          </a:effectRef>
+          <a:fontRef idx="minor">
+            <a:schemeClr val="lt1"/>
+          </a:fontRef>
+        </p:style>
+        <p:txBody>
+          <a:bodyPr rtlCol="0" anchor="ctr"/>
+          <a:lstStyle/>
+          <a:p>
+            <a:pPr algn="ctr"/>
+          </a:p>
+        </p:txBody>
+      </p:sp>
       <p:pic>
         <p:nvPicPr>
-          <p:cNvPr id="8" name="Picture 7" descr="shot_06_admin.png"/>
+          <p:cNvPr id="9" name="Picture 8" descr="shot_06_admin.png"/>
           <p:cNvPicPr>
             <a:picLocks noChangeAspect="1"/>
           </p:cNvPicPr>
@@ -5734,8 +6004,8 @@
         </p:blipFill>
         <p:spPr>
           <a:xfrm>
-            <a:off x="5029200" y="1554480"/>
-            <a:ext cx="6400800" cy="4846320"/>
+            <a:off x="5029200" y="2178294"/>
+            <a:ext cx="6400800" cy="3598692"/>
           </a:xfrm>
           <a:prstGeom prst="rect">
             <a:avLst/>
@@ -6051,9 +6321,54 @@
           </a:p>
         </p:txBody>
       </p:sp>
+      <p:sp>
+        <p:nvSpPr>
+          <p:cNvPr id="8" name="Rounded Rectangle 7"/>
+          <p:cNvSpPr/>
+          <p:nvPr/>
+        </p:nvSpPr>
+        <p:spPr>
+          <a:xfrm>
+            <a:off x="5029200" y="1554480"/>
+            <a:ext cx="6400800" cy="4846320"/>
+          </a:xfrm>
+          <a:prstGeom prst="roundRect">
+            <a:avLst/>
+          </a:prstGeom>
+          <a:solidFill>
+            <a:srgbClr val="F1F5F9"/>
+          </a:solidFill>
+          <a:ln>
+            <a:solidFill>
+              <a:srgbClr val="E2E8F0"/>
+            </a:solidFill>
+          </a:ln>
+        </p:spPr>
+        <p:style>
+          <a:lnRef idx="1">
+            <a:schemeClr val="accent1"/>
+          </a:lnRef>
+          <a:fillRef idx="3">
+            <a:schemeClr val="accent1"/>
+          </a:fillRef>
+          <a:effectRef idx="2">
+            <a:schemeClr val="accent1"/>
+          </a:effectRef>
+          <a:fontRef idx="minor">
+            <a:schemeClr val="lt1"/>
+          </a:fontRef>
+        </p:style>
+        <p:txBody>
+          <a:bodyPr rtlCol="0" anchor="ctr"/>
+          <a:lstStyle/>
+          <a:p>
+            <a:pPr algn="ctr"/>
+          </a:p>
+        </p:txBody>
+      </p:sp>
       <p:pic>
         <p:nvPicPr>
-          <p:cNvPr id="8" name="Picture 7" descr="shot_07_ghn_dashboard.png"/>
+          <p:cNvPr id="9" name="Picture 8" descr="shot_07_ghn_dashboard.png"/>
           <p:cNvPicPr>
             <a:picLocks noChangeAspect="1"/>
           </p:cNvPicPr>
@@ -6067,8 +6382,8 @@
         </p:blipFill>
         <p:spPr>
           <a:xfrm>
-            <a:off x="5029200" y="1554480"/>
-            <a:ext cx="6400800" cy="4846320"/>
+            <a:off x="6636849" y="1554480"/>
+            <a:ext cx="3185502" cy="4846320"/>
           </a:xfrm>
           <a:prstGeom prst="rect">
             <a:avLst/>
@@ -6384,9 +6699,54 @@
           </a:p>
         </p:txBody>
       </p:sp>
+      <p:sp>
+        <p:nvSpPr>
+          <p:cNvPr id="8" name="Rounded Rectangle 7"/>
+          <p:cNvSpPr/>
+          <p:nvPr/>
+        </p:nvSpPr>
+        <p:spPr>
+          <a:xfrm>
+            <a:off x="5029200" y="1554480"/>
+            <a:ext cx="6400800" cy="4846320"/>
+          </a:xfrm>
+          <a:prstGeom prst="roundRect">
+            <a:avLst/>
+          </a:prstGeom>
+          <a:solidFill>
+            <a:srgbClr val="F1F5F9"/>
+          </a:solidFill>
+          <a:ln>
+            <a:solidFill>
+              <a:srgbClr val="E2E8F0"/>
+            </a:solidFill>
+          </a:ln>
+        </p:spPr>
+        <p:style>
+          <a:lnRef idx="1">
+            <a:schemeClr val="accent1"/>
+          </a:lnRef>
+          <a:fillRef idx="3">
+            <a:schemeClr val="accent1"/>
+          </a:fillRef>
+          <a:effectRef idx="2">
+            <a:schemeClr val="accent1"/>
+          </a:effectRef>
+          <a:fontRef idx="minor">
+            <a:schemeClr val="lt1"/>
+          </a:fontRef>
+        </p:style>
+        <p:txBody>
+          <a:bodyPr rtlCol="0" anchor="ctr"/>
+          <a:lstStyle/>
+          <a:p>
+            <a:pPr algn="ctr"/>
+          </a:p>
+        </p:txBody>
+      </p:sp>
       <p:pic>
         <p:nvPicPr>
-          <p:cNvPr id="8" name="Picture 7" descr="shot_08_ghn_print_slip.png"/>
+          <p:cNvPr id="9" name="Picture 8" descr="shot_08_ghn_print_slip.png"/>
           <p:cNvPicPr>
             <a:picLocks noChangeAspect="1"/>
           </p:cNvPicPr>
@@ -6400,8 +6760,8 @@
         </p:blipFill>
         <p:spPr>
           <a:xfrm>
-            <a:off x="5029200" y="1554480"/>
-            <a:ext cx="6400800" cy="4846320"/>
+            <a:off x="5029200" y="2602468"/>
+            <a:ext cx="6400800" cy="2750343"/>
           </a:xfrm>
           <a:prstGeom prst="rect">
             <a:avLst/>
